--- a/assets/figures-editable/c3-c4/c4-e15.pptx
+++ b/assets/figures-editable/c3-c4/c4-e15.pptx
@@ -3104,8 +3104,8 @@
         </p:nvSpPr>
         <p:spPr>
           <a:xfrm>
-            <a:off x="274320" y="137160"/>
-            <a:ext cx="11612880" cy="365760"/>
+            <a:off x="274320" y="118872"/>
+            <a:ext cx="11612880" cy="340105"/>
           </a:xfrm>
           <a:prstGeom prst="rect">
             <a:avLst/>
@@ -3114,7 +3114,7 @@
           <a:effectLst/>
         </p:spPr>
         <p:txBody>
-          <a:bodyPr wrap="square" lIns="27432" rIns="27432" tIns="18288" bIns="18288" anchor="ctr">
+          <a:bodyPr wrap="none" lIns="18288" rIns="18288" tIns="18288" bIns="18288" anchor="t">
             <a:spAutoFit/>
           </a:bodyPr>
           <a:lstStyle/>
@@ -3125,7 +3125,7 @@
               </a:spcAft>
             </a:pPr>
             <a:r>
-              <a:rPr sz="2100" b="0" i="0">
+              <a:rPr sz="1900" b="1" i="0">
                 <a:solidFill>
                   <a:srgbClr val="8EDBD4"/>
                 </a:solidFill>
@@ -3136,204 +3136,366 @@
           </a:p>
         </p:txBody>
       </p:sp>
-      <p:cxnSp>
-        <p:nvCxnSpPr>
-          <p:cNvPr id="3" name="C4-E15 line 1" descr="sci-ppt:o001"/>
-          <p:cNvCxnSpPr/>
+      <p:sp>
+        <p:nvSpPr>
+          <p:cNvPr id="3" name="C4-E15 text 1" descr="sci-ppt:o001"/>
+          <p:cNvSpPr txBox="1"/>
           <p:nvPr/>
-        </p:nvCxnSpPr>
-        <p:spPr>
-          <a:xfrm>
-            <a:off x="731520" y="2880360"/>
-            <a:ext cx="6675120" cy="0"/>
-          </a:xfrm>
-          <a:prstGeom prst="line">
+        </p:nvSpPr>
+        <p:spPr>
+          <a:xfrm>
+            <a:off x="457200" y="914400"/>
+            <a:ext cx="11247120" cy="254889"/>
+          </a:xfrm>
+          <a:prstGeom prst="rect">
             <a:avLst/>
           </a:prstGeom>
-          <a:ln w="25400">
-            <a:solidFill>
-              <a:srgbClr val="B4C7D2"/>
-            </a:solidFill>
-          </a:ln>
+          <a:noFill/>
           <a:effectLst/>
         </p:spPr>
-      </p:cxnSp>
-      <p:cxnSp>
-        <p:nvCxnSpPr>
-          <p:cNvPr id="4" name="C4-E15 line 2" descr="sci-ppt:o002"/>
-          <p:cNvCxnSpPr/>
+        <p:txBody>
+          <a:bodyPr wrap="none" lIns="18288" rIns="18288" tIns="18288" bIns="18288" anchor="t">
+            <a:spAutoFit/>
+          </a:bodyPr>
+          <a:lstStyle/>
+          <a:p>
+            <a:pPr algn="l">
+              <a:spcAft>
+                <a:spcPts val="0"/>
+              </a:spcAft>
+            </a:pPr>
+            <a:r>
+              <a:rPr sz="1350" b="1" i="0">
+                <a:solidFill>
+                  <a:srgbClr val="8EDBD4"/>
+                </a:solidFill>
+                <a:latin typeface="Arial"/>
+              </a:rPr>
+              <a:t>Second pair of integrations: build w(r)</a:t>
+            </a:r>
+          </a:p>
+        </p:txBody>
+      </p:sp>
+      <p:sp>
+        <p:nvSpPr>
+          <p:cNvPr id="4" name="C4-E15 text 2" descr="sci-ppt:o002"/>
+          <p:cNvSpPr txBox="1"/>
           <p:nvPr/>
-        </p:nvCxnSpPr>
-        <p:spPr>
-          <a:xfrm flipV="1">
-            <a:off x="1005840" y="2876570"/>
-            <a:ext cx="76581" cy="3790"/>
-          </a:xfrm>
-          <a:prstGeom prst="line">
+        </p:nvSpPr>
+        <p:spPr>
+          <a:xfrm>
+            <a:off x="548640" y="1417320"/>
+            <a:ext cx="2834640" cy="231648"/>
+          </a:xfrm>
+          <a:prstGeom prst="rect">
             <a:avLst/>
           </a:prstGeom>
-          <a:ln w="25400">
-            <a:solidFill>
-              <a:srgbClr val="8EDBD4"/>
-            </a:solidFill>
-          </a:ln>
+          <a:noFill/>
           <a:effectLst/>
         </p:spPr>
-      </p:cxnSp>
-      <p:cxnSp>
-        <p:nvCxnSpPr>
-          <p:cNvPr id="5" name="C4-E15 line 3" descr="sci-ppt:o003"/>
-          <p:cNvCxnSpPr/>
+        <p:txBody>
+          <a:bodyPr wrap="none" lIns="18288" rIns="18288" tIns="18288" bIns="18288" anchor="t">
+            <a:spAutoFit/>
+          </a:bodyPr>
+          <a:lstStyle/>
+          <a:p>
+            <a:pPr algn="l">
+              <a:spcAft>
+                <a:spcPts val="0"/>
+              </a:spcAft>
+            </a:pPr>
+            <a:r>
+              <a:rPr sz="1200" b="1" i="0">
+                <a:solidFill>
+                  <a:srgbClr val="7FC8F8"/>
+                </a:solidFill>
+                <a:latin typeface="Arial"/>
+              </a:rPr>
+              <a:t>start</a:t>
+            </a:r>
+          </a:p>
+        </p:txBody>
+      </p:sp>
+      <p:sp>
+        <p:nvSpPr>
+          <p:cNvPr id="5" name="C4-E15 text 3" descr="sci-ppt:o003"/>
+          <p:cNvSpPr txBox="1"/>
           <p:nvPr/>
-        </p:nvCxnSpPr>
-        <p:spPr>
-          <a:xfrm flipV="1">
-            <a:off x="1082421" y="2865582"/>
-            <a:ext cx="76581" cy="10988"/>
-          </a:xfrm>
-          <a:prstGeom prst="line">
+        </p:nvSpPr>
+        <p:spPr>
+          <a:xfrm>
+            <a:off x="3474720" y="1417320"/>
+            <a:ext cx="4937760" cy="239395"/>
+          </a:xfrm>
+          <a:prstGeom prst="rect">
             <a:avLst/>
           </a:prstGeom>
-          <a:ln w="25400">
-            <a:solidFill>
-              <a:srgbClr val="8EDBD4"/>
-            </a:solidFill>
-          </a:ln>
+          <a:noFill/>
           <a:effectLst/>
         </p:spPr>
-      </p:cxnSp>
-      <p:cxnSp>
-        <p:nvCxnSpPr>
-          <p:cNvPr id="6" name="C4-E15 line 4" descr="sci-ppt:o004"/>
-          <p:cNvCxnSpPr/>
+        <p:txBody>
+          <a:bodyPr wrap="none" lIns="18288" rIns="18288" tIns="18288" bIns="18288" anchor="t">
+            <a:spAutoFit/>
+          </a:bodyPr>
+          <a:lstStyle/>
+          <a:p>
+            <a:pPr algn="l">
+              <a:spcAft>
+                <a:spcPts val="0"/>
+              </a:spcAft>
+            </a:pPr>
+            <a:r>
+              <a:rPr sz="1250" b="1" i="0">
+                <a:solidFill>
+                  <a:srgbClr val="E7F0F3"/>
+                </a:solidFill>
+                <a:latin typeface="Arial"/>
+              </a:rPr>
+              <a:t>d/dr (r w′) = r g = p₀ r³ / (4D_f) + C₂ r</a:t>
+            </a:r>
+          </a:p>
+        </p:txBody>
+      </p:sp>
+      <p:sp>
+        <p:nvSpPr>
+          <p:cNvPr id="6" name="C4-E15 text 4" descr="sci-ppt:o004"/>
+          <p:cNvSpPr txBox="1"/>
           <p:nvPr/>
-        </p:nvCxnSpPr>
-        <p:spPr>
-          <a:xfrm flipV="1">
-            <a:off x="1159002" y="2847958"/>
-            <a:ext cx="76581" cy="17624"/>
-          </a:xfrm>
-          <a:prstGeom prst="line">
+        </p:nvSpPr>
+        <p:spPr>
+          <a:xfrm>
+            <a:off x="548640" y="2075688"/>
+            <a:ext cx="2834640" cy="231648"/>
+          </a:xfrm>
+          <a:prstGeom prst="rect">
             <a:avLst/>
           </a:prstGeom>
-          <a:ln w="25400">
-            <a:solidFill>
-              <a:srgbClr val="8EDBD4"/>
-            </a:solidFill>
-          </a:ln>
+          <a:noFill/>
           <a:effectLst/>
         </p:spPr>
-      </p:cxnSp>
-      <p:cxnSp>
-        <p:nvCxnSpPr>
-          <p:cNvPr id="7" name="C4-E15 line 5" descr="sci-ppt:o005"/>
-          <p:cNvCxnSpPr/>
+        <p:txBody>
+          <a:bodyPr wrap="none" lIns="18288" rIns="18288" tIns="18288" bIns="18288" anchor="t">
+            <a:spAutoFit/>
+          </a:bodyPr>
+          <a:lstStyle/>
+          <a:p>
+            <a:pPr algn="l">
+              <a:spcAft>
+                <a:spcPts val="0"/>
+              </a:spcAft>
+            </a:pPr>
+            <a:r>
+              <a:rPr sz="1200" b="1" i="0">
+                <a:solidFill>
+                  <a:srgbClr val="7FC8F8"/>
+                </a:solidFill>
+                <a:latin typeface="Arial"/>
+              </a:rPr>
+              <a:t>integrate</a:t>
+            </a:r>
+          </a:p>
+        </p:txBody>
+      </p:sp>
+      <p:sp>
+        <p:nvSpPr>
+          <p:cNvPr id="7" name="C4-E15 text 5" descr="sci-ppt:o005"/>
+          <p:cNvSpPr txBox="1"/>
           <p:nvPr/>
-        </p:nvCxnSpPr>
-        <p:spPr>
-          <a:xfrm flipV="1">
-            <a:off x="1235583" y="2824243"/>
-            <a:ext cx="76581" cy="23715"/>
-          </a:xfrm>
-          <a:prstGeom prst="line">
+        </p:nvSpPr>
+        <p:spPr>
+          <a:xfrm>
+            <a:off x="3474720" y="2075688"/>
+            <a:ext cx="4937760" cy="239395"/>
+          </a:xfrm>
+          <a:prstGeom prst="rect">
             <a:avLst/>
           </a:prstGeom>
-          <a:ln w="25400">
-            <a:solidFill>
-              <a:srgbClr val="8EDBD4"/>
-            </a:solidFill>
-          </a:ln>
+          <a:noFill/>
           <a:effectLst/>
         </p:spPr>
-      </p:cxnSp>
-      <p:cxnSp>
-        <p:nvCxnSpPr>
-          <p:cNvPr id="8" name="C4-E15 line 6" descr="sci-ppt:o006"/>
-          <p:cNvCxnSpPr/>
+        <p:txBody>
+          <a:bodyPr wrap="none" lIns="18288" rIns="18288" tIns="18288" bIns="18288" anchor="t">
+            <a:spAutoFit/>
+          </a:bodyPr>
+          <a:lstStyle/>
+          <a:p>
+            <a:pPr algn="l">
+              <a:spcAft>
+                <a:spcPts val="0"/>
+              </a:spcAft>
+            </a:pPr>
+            <a:r>
+              <a:rPr sz="1250" b="1" i="0">
+                <a:solidFill>
+                  <a:srgbClr val="E7F0F3"/>
+                </a:solidFill>
+                <a:latin typeface="Arial"/>
+              </a:rPr>
+              <a:t>r w′ = p₀ r⁴ / (16D_f) + C₂ r² / 2 + C₃</a:t>
+            </a:r>
+          </a:p>
+        </p:txBody>
+      </p:sp>
+      <p:sp>
+        <p:nvSpPr>
+          <p:cNvPr id="8" name="C4-E15 text 6" descr="sci-ppt:o006"/>
+          <p:cNvSpPr txBox="1"/>
           <p:nvPr/>
-        </p:nvCxnSpPr>
-        <p:spPr>
-          <a:xfrm flipV="1">
-            <a:off x="1312164" y="2794969"/>
-            <a:ext cx="76581" cy="29274"/>
-          </a:xfrm>
-          <a:prstGeom prst="line">
+        </p:nvSpPr>
+        <p:spPr>
+          <a:xfrm>
+            <a:off x="548640" y="2734056"/>
+            <a:ext cx="2834640" cy="231648"/>
+          </a:xfrm>
+          <a:prstGeom prst="rect">
             <a:avLst/>
           </a:prstGeom>
-          <a:ln w="25400">
-            <a:solidFill>
-              <a:srgbClr val="8EDBD4"/>
-            </a:solidFill>
-          </a:ln>
+          <a:noFill/>
           <a:effectLst/>
         </p:spPr>
-      </p:cxnSp>
-      <p:cxnSp>
-        <p:nvCxnSpPr>
-          <p:cNvPr id="9" name="C4-E15 line 7" descr="sci-ppt:o007"/>
-          <p:cNvCxnSpPr/>
+        <p:txBody>
+          <a:bodyPr wrap="none" lIns="18288" rIns="18288" tIns="18288" bIns="18288" anchor="t">
+            <a:spAutoFit/>
+          </a:bodyPr>
+          <a:lstStyle/>
+          <a:p>
+            <a:pPr algn="l">
+              <a:spcAft>
+                <a:spcPts val="0"/>
+              </a:spcAft>
+            </a:pPr>
+            <a:r>
+              <a:rPr sz="1200" b="1" i="0">
+                <a:solidFill>
+                  <a:srgbClr val="F28BA0"/>
+                </a:solidFill>
+                <a:latin typeface="Arial"/>
+              </a:rPr>
+              <a:t>C₃ = 0 (regular)</a:t>
+            </a:r>
+          </a:p>
+        </p:txBody>
+      </p:sp>
+      <p:sp>
+        <p:nvSpPr>
+          <p:cNvPr id="9" name="C4-E15 text 7" descr="sci-ppt:o007"/>
+          <p:cNvSpPr txBox="1"/>
           <p:nvPr/>
-        </p:nvCxnSpPr>
-        <p:spPr>
-          <a:xfrm flipV="1">
-            <a:off x="1388745" y="2760655"/>
-            <a:ext cx="76581" cy="34314"/>
-          </a:xfrm>
-          <a:prstGeom prst="line">
+        </p:nvSpPr>
+        <p:spPr>
+          <a:xfrm>
+            <a:off x="3474720" y="2734056"/>
+            <a:ext cx="4937760" cy="239395"/>
+          </a:xfrm>
+          <a:prstGeom prst="rect">
             <a:avLst/>
           </a:prstGeom>
-          <a:ln w="25400">
-            <a:solidFill>
-              <a:srgbClr val="8EDBD4"/>
-            </a:solidFill>
-          </a:ln>
+          <a:noFill/>
           <a:effectLst/>
         </p:spPr>
-      </p:cxnSp>
-      <p:cxnSp>
-        <p:nvCxnSpPr>
-          <p:cNvPr id="10" name="C4-E15 line 8" descr="sci-ppt:o008"/>
-          <p:cNvCxnSpPr/>
+        <p:txBody>
+          <a:bodyPr wrap="none" lIns="18288" rIns="18288" tIns="18288" bIns="18288" anchor="t">
+            <a:spAutoFit/>
+          </a:bodyPr>
+          <a:lstStyle/>
+          <a:p>
+            <a:pPr algn="l">
+              <a:spcAft>
+                <a:spcPts val="0"/>
+              </a:spcAft>
+            </a:pPr>
+            <a:r>
+              <a:rPr sz="1250" b="1" i="0">
+                <a:solidFill>
+                  <a:srgbClr val="E7F0F3"/>
+                </a:solidFill>
+                <a:latin typeface="Arial"/>
+              </a:rPr>
+              <a:t>w′ = p₀ r³ / (16D_f) + C₂ r / 2</a:t>
+            </a:r>
+          </a:p>
+        </p:txBody>
+      </p:sp>
+      <p:sp>
+        <p:nvSpPr>
+          <p:cNvPr id="10" name="C4-E15 text 8" descr="sci-ppt:o008"/>
+          <p:cNvSpPr txBox="1"/>
           <p:nvPr/>
-        </p:nvCxnSpPr>
-        <p:spPr>
-          <a:xfrm flipV="1">
-            <a:off x="1465326" y="2721802"/>
-            <a:ext cx="76581" cy="38853"/>
-          </a:xfrm>
-          <a:prstGeom prst="line">
+        </p:nvSpPr>
+        <p:spPr>
+          <a:xfrm>
+            <a:off x="548640" y="3392424"/>
+            <a:ext cx="2834640" cy="231648"/>
+          </a:xfrm>
+          <a:prstGeom prst="rect">
             <a:avLst/>
           </a:prstGeom>
-          <a:ln w="25400">
-            <a:solidFill>
-              <a:srgbClr val="8EDBD4"/>
-            </a:solidFill>
-          </a:ln>
+          <a:noFill/>
           <a:effectLst/>
         </p:spPr>
-      </p:cxnSp>
-      <p:cxnSp>
-        <p:nvCxnSpPr>
-          <p:cNvPr id="11" name="C4-E15 line 9" descr="sci-ppt:o009"/>
-          <p:cNvCxnSpPr/>
+        <p:txBody>
+          <a:bodyPr wrap="none" lIns="18288" rIns="18288" tIns="18288" bIns="18288" anchor="t">
+            <a:spAutoFit/>
+          </a:bodyPr>
+          <a:lstStyle/>
+          <a:p>
+            <a:pPr algn="l">
+              <a:spcAft>
+                <a:spcPts val="0"/>
+              </a:spcAft>
+            </a:pPr>
+            <a:r>
+              <a:rPr sz="1200" b="1" i="0">
+                <a:solidFill>
+                  <a:srgbClr val="8EDBD4"/>
+                </a:solidFill>
+                <a:latin typeface="Arial"/>
+              </a:rPr>
+              <a:t>integrate</a:t>
+            </a:r>
+          </a:p>
+        </p:txBody>
+      </p:sp>
+      <p:sp>
+        <p:nvSpPr>
+          <p:cNvPr id="11" name="C4-E15 text 9" descr="sci-ppt:o009"/>
+          <p:cNvSpPr txBox="1"/>
           <p:nvPr/>
-        </p:nvCxnSpPr>
-        <p:spPr>
-          <a:xfrm flipV="1">
-            <a:off x="1541907" y="2678899"/>
-            <a:ext cx="76581" cy="42903"/>
-          </a:xfrm>
-          <a:prstGeom prst="line">
+        </p:nvSpPr>
+        <p:spPr>
+          <a:xfrm>
+            <a:off x="3474720" y="3392424"/>
+            <a:ext cx="4937760" cy="239395"/>
+          </a:xfrm>
+          <a:prstGeom prst="rect">
             <a:avLst/>
           </a:prstGeom>
-          <a:ln w="25400">
-            <a:solidFill>
-              <a:srgbClr val="8EDBD4"/>
-            </a:solidFill>
-          </a:ln>
+          <a:noFill/>
           <a:effectLst/>
         </p:spPr>
-      </p:cxnSp>
+        <p:txBody>
+          <a:bodyPr wrap="none" lIns="18288" rIns="18288" tIns="18288" bIns="18288" anchor="t">
+            <a:spAutoFit/>
+          </a:bodyPr>
+          <a:lstStyle/>
+          <a:p>
+            <a:pPr algn="l">
+              <a:spcAft>
+                <a:spcPts val="0"/>
+              </a:spcAft>
+            </a:pPr>
+            <a:r>
+              <a:rPr sz="1250" b="1" i="0">
+                <a:solidFill>
+                  <a:srgbClr val="E7F0F3"/>
+                </a:solidFill>
+                <a:latin typeface="Arial"/>
+              </a:rPr>
+              <a:t>w = p₀ r⁴ / (64D_f) + C₂ r² / 4 + C₄</a:t>
+            </a:r>
+          </a:p>
+        </p:txBody>
+      </p:sp>
       <p:cxnSp>
         <p:nvCxnSpPr>
           <p:cNvPr id="12" name="C4-E15 line 10" descr="sci-ppt:o010"/>
@@ -3341,16 +3503,16 @@
           <p:nvPr/>
         </p:nvCxnSpPr>
         <p:spPr>
-          <a:xfrm flipV="1">
-            <a:off x="1618488" y="2632419"/>
-            <a:ext cx="76581" cy="46480"/>
+          <a:xfrm>
+            <a:off x="8778240" y="4480560"/>
+            <a:ext cx="2926080" cy="0"/>
           </a:xfrm>
           <a:prstGeom prst="line">
             <a:avLst/>
           </a:prstGeom>
-          <a:ln w="25400">
+          <a:ln w="19050">
             <a:solidFill>
-              <a:srgbClr val="8EDBD4"/>
+              <a:srgbClr val="B4C7D2"/>
             </a:solidFill>
           </a:ln>
           <a:effectLst/>
@@ -3363,16 +3525,16 @@
           <p:nvPr/>
         </p:nvCxnSpPr>
         <p:spPr>
-          <a:xfrm flipV="1">
-            <a:off x="1695069" y="2582822"/>
-            <a:ext cx="76581" cy="49597"/>
+          <a:xfrm>
+            <a:off x="8778240" y="1371600"/>
+            <a:ext cx="0" cy="3108960"/>
           </a:xfrm>
           <a:prstGeom prst="line">
             <a:avLst/>
           </a:prstGeom>
-          <a:ln w="25400">
+          <a:ln w="19050">
             <a:solidFill>
-              <a:srgbClr val="8EDBD4"/>
+              <a:srgbClr val="B4C7D2"/>
             </a:solidFill>
           </a:ln>
           <a:effectLst/>
@@ -3385,16 +3547,16 @@
           <p:nvPr/>
         </p:nvCxnSpPr>
         <p:spPr>
-          <a:xfrm flipV="1">
-            <a:off x="1771650" y="2530552"/>
-            <a:ext cx="76581" cy="52270"/>
+          <a:xfrm>
+            <a:off x="8778240" y="4480560"/>
+            <a:ext cx="0" cy="64008"/>
           </a:xfrm>
           <a:prstGeom prst="line">
             <a:avLst/>
           </a:prstGeom>
-          <a:ln w="25400">
+          <a:ln w="12700">
             <a:solidFill>
-              <a:srgbClr val="8EDBD4"/>
+              <a:srgbClr val="B4C7D2"/>
             </a:solidFill>
           </a:ln>
           <a:effectLst/>
@@ -3407,43 +3569,61 @@
           <p:nvPr/>
         </p:nvCxnSpPr>
         <p:spPr>
-          <a:xfrm flipV="1">
-            <a:off x="1848231" y="2476039"/>
-            <a:ext cx="76581" cy="54513"/>
+          <a:xfrm>
+            <a:off x="8778240" y="1371600"/>
+            <a:ext cx="0" cy="3108960"/>
           </a:xfrm>
           <a:prstGeom prst="line">
             <a:avLst/>
           </a:prstGeom>
-          <a:ln w="25400">
+          <a:ln w="7620">
             <a:solidFill>
-              <a:srgbClr val="8EDBD4"/>
+              <a:srgbClr val="2E4756"/>
             </a:solidFill>
           </a:ln>
           <a:effectLst/>
         </p:spPr>
       </p:cxnSp>
-      <p:cxnSp>
-        <p:nvCxnSpPr>
-          <p:cNvPr id="16" name="C4-E15 line 14" descr="sci-ppt:o014"/>
-          <p:cNvCxnSpPr/>
+      <p:sp>
+        <p:nvSpPr>
+          <p:cNvPr id="16" name="C4-E15 text 14" descr="sci-ppt:o014"/>
+          <p:cNvSpPr txBox="1"/>
           <p:nvPr/>
-        </p:nvCxnSpPr>
-        <p:spPr>
-          <a:xfrm flipV="1">
-            <a:off x="1924812" y="2419698"/>
-            <a:ext cx="76581" cy="56341"/>
-          </a:xfrm>
-          <a:prstGeom prst="line">
+        </p:nvSpPr>
+        <p:spPr>
+          <a:xfrm>
+            <a:off x="8321040" y="4562856"/>
+            <a:ext cx="914400" cy="208407"/>
+          </a:xfrm>
+          <a:prstGeom prst="rect">
             <a:avLst/>
           </a:prstGeom>
-          <a:ln w="25400">
-            <a:solidFill>
-              <a:srgbClr val="8EDBD4"/>
-            </a:solidFill>
-          </a:ln>
+          <a:noFill/>
           <a:effectLst/>
         </p:spPr>
-      </p:cxnSp>
+        <p:txBody>
+          <a:bodyPr wrap="none" lIns="18288" rIns="18288" tIns="18288" bIns="18288" anchor="t">
+            <a:spAutoFit/>
+          </a:bodyPr>
+          <a:lstStyle/>
+          <a:p>
+            <a:pPr algn="ctr">
+              <a:spcAft>
+                <a:spcPts val="0"/>
+              </a:spcAft>
+            </a:pPr>
+            <a:r>
+              <a:rPr sz="1050" b="0" i="0">
+                <a:solidFill>
+                  <a:srgbClr val="B4C7D2"/>
+                </a:solidFill>
+                <a:latin typeface="Arial"/>
+              </a:rPr>
+              <a:t>0</a:t>
+            </a:r>
+          </a:p>
+        </p:txBody>
+      </p:sp>
       <p:cxnSp>
         <p:nvCxnSpPr>
           <p:cNvPr id="17" name="C4-E15 line 15" descr="sci-ppt:o015"/>
@@ -3451,16 +3631,16 @@
           <p:nvPr/>
         </p:nvCxnSpPr>
         <p:spPr>
-          <a:xfrm flipV="1">
-            <a:off x="2001393" y="2361931"/>
-            <a:ext cx="76581" cy="57767"/>
+          <a:xfrm>
+            <a:off x="10241280" y="4480560"/>
+            <a:ext cx="0" cy="64008"/>
           </a:xfrm>
           <a:prstGeom prst="line">
             <a:avLst/>
           </a:prstGeom>
-          <a:ln w="25400">
+          <a:ln w="12700">
             <a:solidFill>
-              <a:srgbClr val="8EDBD4"/>
+              <a:srgbClr val="B4C7D2"/>
             </a:solidFill>
           </a:ln>
           <a:effectLst/>
@@ -3473,43 +3653,61 @@
           <p:nvPr/>
         </p:nvCxnSpPr>
         <p:spPr>
-          <a:xfrm flipV="1">
-            <a:off x="2077974" y="2303122"/>
-            <a:ext cx="76581" cy="58809"/>
+          <a:xfrm>
+            <a:off x="10241280" y="1371600"/>
+            <a:ext cx="0" cy="3108960"/>
           </a:xfrm>
           <a:prstGeom prst="line">
             <a:avLst/>
           </a:prstGeom>
-          <a:ln w="25400">
+          <a:ln w="7620">
             <a:solidFill>
-              <a:srgbClr val="8EDBD4"/>
+              <a:srgbClr val="2E4756"/>
             </a:solidFill>
           </a:ln>
           <a:effectLst/>
         </p:spPr>
       </p:cxnSp>
-      <p:cxnSp>
-        <p:nvCxnSpPr>
-          <p:cNvPr id="19" name="C4-E15 line 17" descr="sci-ppt:o017"/>
-          <p:cNvCxnSpPr/>
+      <p:sp>
+        <p:nvSpPr>
+          <p:cNvPr id="19" name="C4-E15 text 17" descr="sci-ppt:o017"/>
+          <p:cNvSpPr txBox="1"/>
           <p:nvPr/>
-        </p:nvCxnSpPr>
-        <p:spPr>
-          <a:xfrm flipV="1">
-            <a:off x="2154555" y="2243644"/>
-            <a:ext cx="76581" cy="59478"/>
-          </a:xfrm>
-          <a:prstGeom prst="line">
+        </p:nvSpPr>
+        <p:spPr>
+          <a:xfrm>
+            <a:off x="9784080" y="4562856"/>
+            <a:ext cx="914400" cy="208407"/>
+          </a:xfrm>
+          <a:prstGeom prst="rect">
             <a:avLst/>
           </a:prstGeom>
-          <a:ln w="25400">
-            <a:solidFill>
-              <a:srgbClr val="8EDBD4"/>
-            </a:solidFill>
-          </a:ln>
+          <a:noFill/>
           <a:effectLst/>
         </p:spPr>
-      </p:cxnSp>
+        <p:txBody>
+          <a:bodyPr wrap="none" lIns="18288" rIns="18288" tIns="18288" bIns="18288" anchor="t">
+            <a:spAutoFit/>
+          </a:bodyPr>
+          <a:lstStyle/>
+          <a:p>
+            <a:pPr algn="ctr">
+              <a:spcAft>
+                <a:spcPts val="0"/>
+              </a:spcAft>
+            </a:pPr>
+            <a:r>
+              <a:rPr sz="1050" b="0" i="0">
+                <a:solidFill>
+                  <a:srgbClr val="B4C7D2"/>
+                </a:solidFill>
+                <a:latin typeface="Arial"/>
+              </a:rPr>
+              <a:t>0.5</a:t>
+            </a:r>
+          </a:p>
+        </p:txBody>
+      </p:sp>
       <p:cxnSp>
         <p:nvCxnSpPr>
           <p:cNvPr id="20" name="C4-E15 line 18" descr="sci-ppt:o018"/>
@@ -3517,16 +3715,16 @@
           <p:nvPr/>
         </p:nvCxnSpPr>
         <p:spPr>
-          <a:xfrm flipV="1">
-            <a:off x="2231136" y="2183855"/>
-            <a:ext cx="76581" cy="59789"/>
+          <a:xfrm>
+            <a:off x="11704320" y="4480560"/>
+            <a:ext cx="0" cy="64008"/>
           </a:xfrm>
           <a:prstGeom prst="line">
             <a:avLst/>
           </a:prstGeom>
-          <a:ln w="25400">
+          <a:ln w="12700">
             <a:solidFill>
-              <a:srgbClr val="8EDBD4"/>
+              <a:srgbClr val="B4C7D2"/>
             </a:solidFill>
           </a:ln>
           <a:effectLst/>
@@ -3539,43 +3737,61 @@
           <p:nvPr/>
         </p:nvCxnSpPr>
         <p:spPr>
-          <a:xfrm flipV="1">
-            <a:off x="2307717" y="2124095"/>
-            <a:ext cx="76581" cy="59760"/>
+          <a:xfrm>
+            <a:off x="11704320" y="1371600"/>
+            <a:ext cx="0" cy="3108960"/>
           </a:xfrm>
           <a:prstGeom prst="line">
             <a:avLst/>
           </a:prstGeom>
-          <a:ln w="25400">
+          <a:ln w="7620">
             <a:solidFill>
-              <a:srgbClr val="8EDBD4"/>
+              <a:srgbClr val="2E4756"/>
             </a:solidFill>
           </a:ln>
           <a:effectLst/>
         </p:spPr>
       </p:cxnSp>
-      <p:cxnSp>
-        <p:nvCxnSpPr>
-          <p:cNvPr id="22" name="C4-E15 line 20" descr="sci-ppt:o020"/>
-          <p:cNvCxnSpPr/>
+      <p:sp>
+        <p:nvSpPr>
+          <p:cNvPr id="22" name="C4-E15 text 20" descr="sci-ppt:o020"/>
+          <p:cNvSpPr txBox="1"/>
           <p:nvPr/>
-        </p:nvCxnSpPr>
-        <p:spPr>
-          <a:xfrm flipV="1">
-            <a:off x="2384298" y="2064694"/>
-            <a:ext cx="76581" cy="59401"/>
-          </a:xfrm>
-          <a:prstGeom prst="line">
+        </p:nvSpPr>
+        <p:spPr>
+          <a:xfrm>
+            <a:off x="11247120" y="4562856"/>
+            <a:ext cx="914400" cy="208407"/>
+          </a:xfrm>
+          <a:prstGeom prst="rect">
             <a:avLst/>
           </a:prstGeom>
-          <a:ln w="25400">
-            <a:solidFill>
-              <a:srgbClr val="8EDBD4"/>
-            </a:solidFill>
-          </a:ln>
+          <a:noFill/>
           <a:effectLst/>
         </p:spPr>
-      </p:cxnSp>
+        <p:txBody>
+          <a:bodyPr wrap="none" lIns="18288" rIns="18288" tIns="18288" bIns="18288" anchor="t">
+            <a:spAutoFit/>
+          </a:bodyPr>
+          <a:lstStyle/>
+          <a:p>
+            <a:pPr algn="ctr">
+              <a:spcAft>
+                <a:spcPts val="0"/>
+              </a:spcAft>
+            </a:pPr>
+            <a:r>
+              <a:rPr sz="1050" b="0" i="0">
+                <a:solidFill>
+                  <a:srgbClr val="B4C7D2"/>
+                </a:solidFill>
+                <a:latin typeface="Arial"/>
+              </a:rPr>
+              <a:t>1</a:t>
+            </a:r>
+          </a:p>
+        </p:txBody>
+      </p:sp>
       <p:cxnSp>
         <p:nvCxnSpPr>
           <p:cNvPr id="23" name="C4-E15 line 21" descr="sci-ppt:o021"/>
@@ -3583,16 +3799,16 @@
           <p:nvPr/>
         </p:nvCxnSpPr>
         <p:spPr>
-          <a:xfrm flipV="1">
-            <a:off x="2460879" y="2005965"/>
-            <a:ext cx="76581" cy="58729"/>
+          <a:xfrm>
+            <a:off x="8714232" y="4321126"/>
+            <a:ext cx="64008" cy="0"/>
           </a:xfrm>
           <a:prstGeom prst="line">
             <a:avLst/>
           </a:prstGeom>
-          <a:ln w="25400">
+          <a:ln w="12700">
             <a:solidFill>
-              <a:srgbClr val="8EDBD4"/>
+              <a:srgbClr val="B4C7D2"/>
             </a:solidFill>
           </a:ln>
           <a:effectLst/>
@@ -3605,43 +3821,61 @@
           <p:nvPr/>
         </p:nvCxnSpPr>
         <p:spPr>
-          <a:xfrm flipV="1">
-            <a:off x="2537460" y="1948205"/>
-            <a:ext cx="76581" cy="57760"/>
+          <a:xfrm>
+            <a:off x="8778240" y="4321126"/>
+            <a:ext cx="2926080" cy="0"/>
           </a:xfrm>
           <a:prstGeom prst="line">
             <a:avLst/>
           </a:prstGeom>
-          <a:ln w="25400">
+          <a:ln w="7620">
             <a:solidFill>
-              <a:srgbClr val="8EDBD4"/>
+              <a:srgbClr val="2E4756"/>
             </a:solidFill>
           </a:ln>
           <a:effectLst/>
         </p:spPr>
       </p:cxnSp>
-      <p:cxnSp>
-        <p:nvCxnSpPr>
-          <p:cNvPr id="25" name="C4-E15 line 23" descr="sci-ppt:o023"/>
-          <p:cNvCxnSpPr/>
+      <p:sp>
+        <p:nvSpPr>
+          <p:cNvPr id="25" name="C4-E15 text 23" descr="sci-ppt:o023"/>
+          <p:cNvSpPr txBox="1"/>
           <p:nvPr/>
-        </p:nvCxnSpPr>
-        <p:spPr>
-          <a:xfrm flipV="1">
-            <a:off x="2614041" y="1891701"/>
-            <a:ext cx="76581" cy="56504"/>
-          </a:xfrm>
-          <a:prstGeom prst="line">
+        </p:nvSpPr>
+        <p:spPr>
+          <a:xfrm>
+            <a:off x="7909560" y="4238830"/>
+            <a:ext cx="777240" cy="208407"/>
+          </a:xfrm>
+          <a:prstGeom prst="rect">
             <a:avLst/>
           </a:prstGeom>
-          <a:ln w="25400">
-            <a:solidFill>
-              <a:srgbClr val="8EDBD4"/>
-            </a:solidFill>
-          </a:ln>
+          <a:noFill/>
           <a:effectLst/>
         </p:spPr>
-      </p:cxnSp>
+        <p:txBody>
+          <a:bodyPr wrap="none" lIns="18288" rIns="18288" tIns="18288" bIns="18288" anchor="t">
+            <a:spAutoFit/>
+          </a:bodyPr>
+          <a:lstStyle/>
+          <a:p>
+            <a:pPr algn="r">
+              <a:spcAft>
+                <a:spcPts val="0"/>
+              </a:spcAft>
+            </a:pPr>
+            <a:r>
+              <a:rPr sz="1050" b="0" i="0">
+                <a:solidFill>
+                  <a:srgbClr val="B4C7D2"/>
+                </a:solidFill>
+                <a:latin typeface="Arial"/>
+              </a:rPr>
+              <a:t>-2</a:t>
+            </a:r>
+          </a:p>
+        </p:txBody>
+      </p:sp>
       <p:cxnSp>
         <p:nvCxnSpPr>
           <p:cNvPr id="26" name="C4-E15 line 24" descr="sci-ppt:o024"/>
@@ -3649,16 +3883,16 @@
           <p:nvPr/>
         </p:nvCxnSpPr>
         <p:spPr>
-          <a:xfrm flipV="1">
-            <a:off x="2690622" y="1836720"/>
-            <a:ext cx="76581" cy="54981"/>
+          <a:xfrm>
+            <a:off x="8714232" y="3523956"/>
+            <a:ext cx="64008" cy="0"/>
           </a:xfrm>
           <a:prstGeom prst="line">
             <a:avLst/>
           </a:prstGeom>
-          <a:ln w="25400">
+          <a:ln w="12700">
             <a:solidFill>
-              <a:srgbClr val="8EDBD4"/>
+              <a:srgbClr val="B4C7D2"/>
             </a:solidFill>
           </a:ln>
           <a:effectLst/>
@@ -3671,43 +3905,61 @@
           <p:nvPr/>
         </p:nvCxnSpPr>
         <p:spPr>
-          <a:xfrm flipV="1">
-            <a:off x="2767203" y="1783518"/>
-            <a:ext cx="76581" cy="53202"/>
+          <a:xfrm>
+            <a:off x="8778240" y="3523956"/>
+            <a:ext cx="2926080" cy="0"/>
           </a:xfrm>
           <a:prstGeom prst="line">
             <a:avLst/>
           </a:prstGeom>
-          <a:ln w="25400">
+          <a:ln w="7620">
             <a:solidFill>
-              <a:srgbClr val="8EDBD4"/>
+              <a:srgbClr val="2E4756"/>
             </a:solidFill>
           </a:ln>
           <a:effectLst/>
         </p:spPr>
       </p:cxnSp>
-      <p:cxnSp>
-        <p:nvCxnSpPr>
-          <p:cNvPr id="28" name="C4-E15 line 26" descr="sci-ppt:o026"/>
-          <p:cNvCxnSpPr/>
+      <p:sp>
+        <p:nvSpPr>
+          <p:cNvPr id="28" name="C4-E15 text 26" descr="sci-ppt:o026"/>
+          <p:cNvSpPr txBox="1"/>
           <p:nvPr/>
-        </p:nvCxnSpPr>
-        <p:spPr>
-          <a:xfrm flipV="1">
-            <a:off x="2843784" y="1732337"/>
-            <a:ext cx="76581" cy="51181"/>
-          </a:xfrm>
-          <a:prstGeom prst="line">
+        </p:nvSpPr>
+        <p:spPr>
+          <a:xfrm>
+            <a:off x="7909560" y="3441660"/>
+            <a:ext cx="777240" cy="208407"/>
+          </a:xfrm>
+          <a:prstGeom prst="rect">
             <a:avLst/>
           </a:prstGeom>
-          <a:ln w="25400">
-            <a:solidFill>
-              <a:srgbClr val="8EDBD4"/>
-            </a:solidFill>
-          </a:ln>
+          <a:noFill/>
           <a:effectLst/>
         </p:spPr>
-      </p:cxnSp>
+        <p:txBody>
+          <a:bodyPr wrap="none" lIns="18288" rIns="18288" tIns="18288" bIns="18288" anchor="t">
+            <a:spAutoFit/>
+          </a:bodyPr>
+          <a:lstStyle/>
+          <a:p>
+            <a:pPr algn="r">
+              <a:spcAft>
+                <a:spcPts val="0"/>
+              </a:spcAft>
+            </a:pPr>
+            <a:r>
+              <a:rPr sz="1050" b="0" i="0">
+                <a:solidFill>
+                  <a:srgbClr val="B4C7D2"/>
+                </a:solidFill>
+                <a:latin typeface="Arial"/>
+              </a:rPr>
+              <a:t>-1</a:t>
+            </a:r>
+          </a:p>
+        </p:txBody>
+      </p:sp>
       <p:cxnSp>
         <p:nvCxnSpPr>
           <p:cNvPr id="29" name="C4-E15 line 27" descr="sci-ppt:o027"/>
@@ -3715,16 +3967,16 @@
           <p:nvPr/>
         </p:nvCxnSpPr>
         <p:spPr>
-          <a:xfrm flipV="1">
-            <a:off x="2920365" y="1683400"/>
-            <a:ext cx="76581" cy="48937"/>
+          <a:xfrm>
+            <a:off x="8714232" y="2726787"/>
+            <a:ext cx="64008" cy="0"/>
           </a:xfrm>
           <a:prstGeom prst="line">
             <a:avLst/>
           </a:prstGeom>
-          <a:ln w="25400">
+          <a:ln w="12700">
             <a:solidFill>
-              <a:srgbClr val="8EDBD4"/>
+              <a:srgbClr val="B4C7D2"/>
             </a:solidFill>
           </a:ln>
           <a:effectLst/>
@@ -3737,43 +3989,61 @@
           <p:nvPr/>
         </p:nvCxnSpPr>
         <p:spPr>
-          <a:xfrm flipV="1">
-            <a:off x="2996946" y="1636921"/>
-            <a:ext cx="76581" cy="46479"/>
+          <a:xfrm>
+            <a:off x="8778240" y="2726787"/>
+            <a:ext cx="2926080" cy="0"/>
           </a:xfrm>
           <a:prstGeom prst="line">
             <a:avLst/>
           </a:prstGeom>
-          <a:ln w="25400">
+          <a:ln w="7620">
             <a:solidFill>
-              <a:srgbClr val="8EDBD4"/>
+              <a:srgbClr val="2E4756"/>
             </a:solidFill>
           </a:ln>
           <a:effectLst/>
         </p:spPr>
       </p:cxnSp>
-      <p:cxnSp>
-        <p:nvCxnSpPr>
-          <p:cNvPr id="31" name="C4-E15 line 29" descr="sci-ppt:o029"/>
-          <p:cNvCxnSpPr/>
+      <p:sp>
+        <p:nvSpPr>
+          <p:cNvPr id="31" name="C4-E15 text 29" descr="sci-ppt:o029"/>
+          <p:cNvSpPr txBox="1"/>
           <p:nvPr/>
-        </p:nvCxnSpPr>
-        <p:spPr>
-          <a:xfrm flipV="1">
-            <a:off x="3073527" y="1593095"/>
-            <a:ext cx="76581" cy="43826"/>
-          </a:xfrm>
-          <a:prstGeom prst="line">
+        </p:nvSpPr>
+        <p:spPr>
+          <a:xfrm>
+            <a:off x="7909560" y="2644491"/>
+            <a:ext cx="777240" cy="208407"/>
+          </a:xfrm>
+          <a:prstGeom prst="rect">
             <a:avLst/>
           </a:prstGeom>
-          <a:ln w="25400">
-            <a:solidFill>
-              <a:srgbClr val="8EDBD4"/>
-            </a:solidFill>
-          </a:ln>
+          <a:noFill/>
           <a:effectLst/>
         </p:spPr>
-      </p:cxnSp>
+        <p:txBody>
+          <a:bodyPr wrap="none" lIns="18288" rIns="18288" tIns="18288" bIns="18288" anchor="t">
+            <a:spAutoFit/>
+          </a:bodyPr>
+          <a:lstStyle/>
+          <a:p>
+            <a:pPr algn="r">
+              <a:spcAft>
+                <a:spcPts val="0"/>
+              </a:spcAft>
+            </a:pPr>
+            <a:r>
+              <a:rPr sz="1050" b="0" i="0">
+                <a:solidFill>
+                  <a:srgbClr val="B4C7D2"/>
+                </a:solidFill>
+                <a:latin typeface="Arial"/>
+              </a:rPr>
+              <a:t>0</a:t>
+            </a:r>
+          </a:p>
+        </p:txBody>
+      </p:sp>
       <p:cxnSp>
         <p:nvCxnSpPr>
           <p:cNvPr id="32" name="C4-E15 line 30" descr="sci-ppt:o030"/>
@@ -3781,16 +4051,16 @@
           <p:nvPr/>
         </p:nvCxnSpPr>
         <p:spPr>
-          <a:xfrm flipV="1">
-            <a:off x="3150108" y="1552104"/>
-            <a:ext cx="76581" cy="40991"/>
+          <a:xfrm>
+            <a:off x="8714232" y="1929618"/>
+            <a:ext cx="64008" cy="0"/>
           </a:xfrm>
           <a:prstGeom prst="line">
             <a:avLst/>
           </a:prstGeom>
-          <a:ln w="25400">
+          <a:ln w="12700">
             <a:solidFill>
-              <a:srgbClr val="8EDBD4"/>
+              <a:srgbClr val="B4C7D2"/>
             </a:solidFill>
           </a:ln>
           <a:effectLst/>
@@ -3803,1145 +4073,1486 @@
           <p:nvPr/>
         </p:nvCxnSpPr>
         <p:spPr>
-          <a:xfrm flipV="1">
-            <a:off x="3226689" y="1514117"/>
-            <a:ext cx="76581" cy="37987"/>
+          <a:xfrm>
+            <a:off x="8778240" y="1929618"/>
+            <a:ext cx="2926080" cy="0"/>
           </a:xfrm>
           <a:prstGeom prst="line">
             <a:avLst/>
           </a:prstGeom>
-          <a:ln w="25400">
+          <a:ln w="7620">
+            <a:solidFill>
+              <a:srgbClr val="2E4756"/>
+            </a:solidFill>
+          </a:ln>
+          <a:effectLst/>
+        </p:spPr>
+      </p:cxnSp>
+      <p:sp>
+        <p:nvSpPr>
+          <p:cNvPr id="34" name="C4-E15 text 32" descr="sci-ppt:o032"/>
+          <p:cNvSpPr txBox="1"/>
+          <p:nvPr/>
+        </p:nvSpPr>
+        <p:spPr>
+          <a:xfrm>
+            <a:off x="7909560" y="1847322"/>
+            <a:ext cx="777240" cy="208407"/>
+          </a:xfrm>
+          <a:prstGeom prst="rect">
+            <a:avLst/>
+          </a:prstGeom>
+          <a:noFill/>
+          <a:effectLst/>
+        </p:spPr>
+        <p:txBody>
+          <a:bodyPr wrap="none" lIns="18288" rIns="18288" tIns="18288" bIns="18288" anchor="t">
+            <a:spAutoFit/>
+          </a:bodyPr>
+          <a:lstStyle/>
+          <a:p>
+            <a:pPr algn="r">
+              <a:spcAft>
+                <a:spcPts val="0"/>
+              </a:spcAft>
+            </a:pPr>
+            <a:r>
+              <a:rPr sz="1050" b="0" i="0">
+                <a:solidFill>
+                  <a:srgbClr val="B4C7D2"/>
+                </a:solidFill>
+                <a:latin typeface="Arial"/>
+              </a:rPr>
+              <a:t>1</a:t>
+            </a:r>
+          </a:p>
+        </p:txBody>
+      </p:sp>
+      <p:sp>
+        <p:nvSpPr>
+          <p:cNvPr id="35" name="C4-E15 text 33" descr="sci-ppt:o033"/>
+          <p:cNvSpPr txBox="1"/>
+          <p:nvPr/>
+        </p:nvSpPr>
+        <p:spPr>
+          <a:xfrm>
+            <a:off x="8778240" y="4764024"/>
+            <a:ext cx="2926080" cy="231648"/>
+          </a:xfrm>
+          <a:prstGeom prst="rect">
+            <a:avLst/>
+          </a:prstGeom>
+          <a:noFill/>
+          <a:effectLst/>
+        </p:spPr>
+        <p:txBody>
+          <a:bodyPr wrap="none" lIns="18288" rIns="18288" tIns="18288" bIns="18288" anchor="t">
+            <a:spAutoFit/>
+          </a:bodyPr>
+          <a:lstStyle/>
+          <a:p>
+            <a:pPr algn="ctr">
+              <a:spcAft>
+                <a:spcPts val="0"/>
+              </a:spcAft>
+            </a:pPr>
+            <a:r>
+              <a:rPr sz="1200" b="0" i="0">
+                <a:solidFill>
+                  <a:srgbClr val="E7F0F3"/>
+                </a:solidFill>
+                <a:latin typeface="Arial"/>
+              </a:rPr>
+              <a:t>r / b</a:t>
+            </a:r>
+          </a:p>
+        </p:txBody>
+      </p:sp>
+      <p:sp>
+        <p:nvSpPr>
+          <p:cNvPr id="36" name="C4-E15 text 34" descr="sci-ppt:o034"/>
+          <p:cNvSpPr txBox="1"/>
+          <p:nvPr/>
+        </p:nvSpPr>
+        <p:spPr>
+          <a:xfrm>
+            <a:off x="8229600" y="1024128"/>
+            <a:ext cx="2926080" cy="231648"/>
+          </a:xfrm>
+          <a:prstGeom prst="rect">
+            <a:avLst/>
+          </a:prstGeom>
+          <a:noFill/>
+          <a:effectLst/>
+        </p:spPr>
+        <p:txBody>
+          <a:bodyPr wrap="none" lIns="18288" rIns="18288" tIns="18288" bIns="18288" anchor="t">
+            <a:spAutoFit/>
+          </a:bodyPr>
+          <a:lstStyle/>
+          <a:p>
+            <a:pPr algn="l">
+              <a:spcAft>
+                <a:spcPts val="0"/>
+              </a:spcAft>
+            </a:pPr>
+            <a:r>
+              <a:rPr sz="1200" b="0" i="0">
+                <a:solidFill>
+                  <a:srgbClr val="E7F0F3"/>
+                </a:solidFill>
+                <a:latin typeface="Arial"/>
+              </a:rPr>
+              <a:t>terms of 64D_f w / p₀b⁴</a:t>
+            </a:r>
+          </a:p>
+        </p:txBody>
+      </p:sp>
+      <p:sp>
+        <p:nvSpPr>
+          <p:cNvPr id="37" name="C4-E15 polygon 35" descr="sci-ppt:o035"/>
+          <p:cNvSpPr/>
+          <p:nvPr/>
+        </p:nvSpPr>
+        <p:spPr>
+          <a:xfrm>
+            <a:off x="8778240" y="1929618"/>
+            <a:ext cx="2926080" cy="797169"/>
+          </a:xfrm>
+          <a:custGeom>
+            <a:avLst/>
+            <a:gdLst/>
+            <a:ahLst/>
+            <a:cxnLst/>
+            <a:rect l="l" t="t" r="r" b="b"/>
+            <a:pathLst>
+              <a:path w="2926080" h="797169">
+                <a:moveTo>
+                  <a:pt x="0" y="797169"/>
+                </a:moveTo>
+                <a:lnTo>
+                  <a:pt x="29556" y="797169"/>
+                </a:lnTo>
+                <a:lnTo>
+                  <a:pt x="59112" y="797169"/>
+                </a:lnTo>
+                <a:lnTo>
+                  <a:pt x="88669" y="797169"/>
+                </a:lnTo>
+                <a:lnTo>
+                  <a:pt x="118225" y="797167"/>
+                </a:lnTo>
+                <a:lnTo>
+                  <a:pt x="147781" y="797164"/>
+                </a:lnTo>
+                <a:lnTo>
+                  <a:pt x="177338" y="797158"/>
+                </a:lnTo>
+                <a:lnTo>
+                  <a:pt x="206894" y="797149"/>
+                </a:lnTo>
+                <a:lnTo>
+                  <a:pt x="236450" y="797135"/>
+                </a:lnTo>
+                <a:lnTo>
+                  <a:pt x="266007" y="797115"/>
+                </a:lnTo>
+                <a:lnTo>
+                  <a:pt x="295563" y="797086"/>
+                </a:lnTo>
+                <a:lnTo>
+                  <a:pt x="325120" y="797048"/>
+                </a:lnTo>
+                <a:lnTo>
+                  <a:pt x="354676" y="796997"/>
+                </a:lnTo>
+                <a:lnTo>
+                  <a:pt x="384232" y="796932"/>
+                </a:lnTo>
+                <a:lnTo>
+                  <a:pt x="413789" y="796850"/>
+                </a:lnTo>
+                <a:lnTo>
+                  <a:pt x="443345" y="796749"/>
+                </a:lnTo>
+                <a:lnTo>
+                  <a:pt x="472901" y="796625"/>
+                </a:lnTo>
+                <a:lnTo>
+                  <a:pt x="502458" y="796476"/>
+                </a:lnTo>
+                <a:lnTo>
+                  <a:pt x="532014" y="796298"/>
+                </a:lnTo>
+                <a:lnTo>
+                  <a:pt x="561570" y="796088"/>
+                </a:lnTo>
+                <a:lnTo>
+                  <a:pt x="591127" y="795841"/>
+                </a:lnTo>
+                <a:lnTo>
+                  <a:pt x="620683" y="795555"/>
+                </a:lnTo>
+                <a:lnTo>
+                  <a:pt x="650239" y="795225"/>
+                </a:lnTo>
+                <a:lnTo>
+                  <a:pt x="679796" y="794847"/>
+                </a:lnTo>
+                <a:lnTo>
+                  <a:pt x="709352" y="794416"/>
+                </a:lnTo>
+                <a:lnTo>
+                  <a:pt x="738909" y="793928"/>
+                </a:lnTo>
+                <a:lnTo>
+                  <a:pt x="768465" y="793377"/>
+                </a:lnTo>
+                <a:lnTo>
+                  <a:pt x="798021" y="792759"/>
+                </a:lnTo>
+                <a:lnTo>
+                  <a:pt x="827578" y="792068"/>
+                </a:lnTo>
+                <a:lnTo>
+                  <a:pt x="857134" y="791300"/>
+                </a:lnTo>
+                <a:lnTo>
+                  <a:pt x="886690" y="790447"/>
+                </a:lnTo>
+                <a:lnTo>
+                  <a:pt x="916247" y="789505"/>
+                </a:lnTo>
+                <a:lnTo>
+                  <a:pt x="945803" y="788467"/>
+                </a:lnTo>
+                <a:lnTo>
+                  <a:pt x="975360" y="787328"/>
+                </a:lnTo>
+                <a:lnTo>
+                  <a:pt x="1004916" y="786079"/>
+                </a:lnTo>
+                <a:lnTo>
+                  <a:pt x="1034472" y="784716"/>
+                </a:lnTo>
+                <a:lnTo>
+                  <a:pt x="1064029" y="783231"/>
+                </a:lnTo>
+                <a:lnTo>
+                  <a:pt x="1093585" y="781616"/>
+                </a:lnTo>
+                <a:lnTo>
+                  <a:pt x="1123141" y="779865"/>
+                </a:lnTo>
+                <a:lnTo>
+                  <a:pt x="1152698" y="777971"/>
+                </a:lnTo>
+                <a:lnTo>
+                  <a:pt x="1182254" y="775925"/>
+                </a:lnTo>
+                <a:lnTo>
+                  <a:pt x="1211810" y="773719"/>
+                </a:lnTo>
+                <a:lnTo>
+                  <a:pt x="1241367" y="771346"/>
+                </a:lnTo>
+                <a:lnTo>
+                  <a:pt x="1270923" y="768798"/>
+                </a:lnTo>
+                <a:lnTo>
+                  <a:pt x="1300480" y="766065"/>
+                </a:lnTo>
+                <a:lnTo>
+                  <a:pt x="1330036" y="763139"/>
+                </a:lnTo>
+                <a:lnTo>
+                  <a:pt x="1359592" y="760012"/>
+                </a:lnTo>
+                <a:lnTo>
+                  <a:pt x="1389149" y="756674"/>
+                </a:lnTo>
+                <a:lnTo>
+                  <a:pt x="1418705" y="753116"/>
+                </a:lnTo>
+                <a:lnTo>
+                  <a:pt x="1448261" y="749329"/>
+                </a:lnTo>
+                <a:lnTo>
+                  <a:pt x="1477818" y="745302"/>
+                </a:lnTo>
+                <a:lnTo>
+                  <a:pt x="1507374" y="741027"/>
+                </a:lnTo>
+                <a:lnTo>
+                  <a:pt x="1536930" y="736492"/>
+                </a:lnTo>
+                <a:lnTo>
+                  <a:pt x="1566487" y="731689"/>
+                </a:lnTo>
+                <a:lnTo>
+                  <a:pt x="1596043" y="726605"/>
+                </a:lnTo>
+                <a:lnTo>
+                  <a:pt x="1625600" y="721231"/>
+                </a:lnTo>
+                <a:lnTo>
+                  <a:pt x="1655156" y="715556"/>
+                </a:lnTo>
+                <a:lnTo>
+                  <a:pt x="1684712" y="709568"/>
+                </a:lnTo>
+                <a:lnTo>
+                  <a:pt x="1714269" y="703257"/>
+                </a:lnTo>
+                <a:lnTo>
+                  <a:pt x="1743825" y="696611"/>
+                </a:lnTo>
+                <a:lnTo>
+                  <a:pt x="1773381" y="689618"/>
+                </a:lnTo>
+                <a:lnTo>
+                  <a:pt x="1802938" y="682267"/>
+                </a:lnTo>
+                <a:lnTo>
+                  <a:pt x="1832494" y="674545"/>
+                </a:lnTo>
+                <a:lnTo>
+                  <a:pt x="1862050" y="666440"/>
+                </a:lnTo>
+                <a:lnTo>
+                  <a:pt x="1891607" y="657940"/>
+                </a:lnTo>
+                <a:lnTo>
+                  <a:pt x="1921163" y="649032"/>
+                </a:lnTo>
+                <a:lnTo>
+                  <a:pt x="1950720" y="639704"/>
+                </a:lnTo>
+                <a:lnTo>
+                  <a:pt x="1980276" y="629941"/>
+                </a:lnTo>
+                <a:lnTo>
+                  <a:pt x="2009832" y="619732"/>
+                </a:lnTo>
+                <a:lnTo>
+                  <a:pt x="2039389" y="609062"/>
+                </a:lnTo>
+                <a:lnTo>
+                  <a:pt x="2068945" y="597918"/>
+                </a:lnTo>
+                <a:lnTo>
+                  <a:pt x="2098501" y="586285"/>
+                </a:lnTo>
+                <a:lnTo>
+                  <a:pt x="2128058" y="574151"/>
+                </a:lnTo>
+                <a:lnTo>
+                  <a:pt x="2157614" y="561501"/>
+                </a:lnTo>
+                <a:lnTo>
+                  <a:pt x="2187170" y="548320"/>
+                </a:lnTo>
+                <a:lnTo>
+                  <a:pt x="2216727" y="534593"/>
+                </a:lnTo>
+                <a:lnTo>
+                  <a:pt x="2246283" y="520307"/>
+                </a:lnTo>
+                <a:lnTo>
+                  <a:pt x="2275840" y="505445"/>
+                </a:lnTo>
+                <a:lnTo>
+                  <a:pt x="2305396" y="489993"/>
+                </a:lnTo>
+                <a:lnTo>
+                  <a:pt x="2334952" y="473934"/>
+                </a:lnTo>
+                <a:lnTo>
+                  <a:pt x="2364509" y="457255"/>
+                </a:lnTo>
+                <a:lnTo>
+                  <a:pt x="2394065" y="439938"/>
+                </a:lnTo>
+                <a:lnTo>
+                  <a:pt x="2423621" y="421967"/>
+                </a:lnTo>
+                <a:lnTo>
+                  <a:pt x="2453178" y="403327"/>
+                </a:lnTo>
+                <a:lnTo>
+                  <a:pt x="2482734" y="384001"/>
+                </a:lnTo>
+                <a:lnTo>
+                  <a:pt x="2512290" y="363972"/>
+                </a:lnTo>
+                <a:lnTo>
+                  <a:pt x="2541847" y="343224"/>
+                </a:lnTo>
+                <a:lnTo>
+                  <a:pt x="2571403" y="321739"/>
+                </a:lnTo>
+                <a:lnTo>
+                  <a:pt x="2600960" y="299500"/>
+                </a:lnTo>
+                <a:lnTo>
+                  <a:pt x="2630516" y="276491"/>
+                </a:lnTo>
+                <a:lnTo>
+                  <a:pt x="2660072" y="252692"/>
+                </a:lnTo>
+                <a:lnTo>
+                  <a:pt x="2689629" y="228087"/>
+                </a:lnTo>
+                <a:lnTo>
+                  <a:pt x="2719185" y="202657"/>
+                </a:lnTo>
+                <a:lnTo>
+                  <a:pt x="2748741" y="176384"/>
+                </a:lnTo>
+                <a:lnTo>
+                  <a:pt x="2778298" y="149250"/>
+                </a:lnTo>
+                <a:lnTo>
+                  <a:pt x="2807854" y="121235"/>
+                </a:lnTo>
+                <a:lnTo>
+                  <a:pt x="2837410" y="92322"/>
+                </a:lnTo>
+                <a:lnTo>
+                  <a:pt x="2866967" y="62492"/>
+                </a:lnTo>
+                <a:lnTo>
+                  <a:pt x="2896523" y="31724"/>
+                </a:lnTo>
+                <a:lnTo>
+                  <a:pt x="2926080" y="0"/>
+                </a:lnTo>
+              </a:path>
+            </a:pathLst>
+          </a:custGeom>
+          <a:noFill/>
+          <a:ln w="33020">
             <a:solidFill>
               <a:srgbClr val="8EDBD4"/>
             </a:solidFill>
           </a:ln>
           <a:effectLst/>
         </p:spPr>
-      </p:cxnSp>
-      <p:cxnSp>
-        <p:nvCxnSpPr>
-          <p:cNvPr id="34" name="C4-E15 line 32" descr="sci-ppt:o032"/>
-          <p:cNvCxnSpPr/>
+        <p:txBody>
+          <a:bodyPr rtlCol="0" anchor="ctr"/>
+          <a:lstStyle/>
+          <a:p>
+            <a:pPr algn="ctr"/>
+          </a:p>
+        </p:txBody>
+      </p:sp>
+      <p:sp>
+        <p:nvSpPr>
+          <p:cNvPr id="38" name="C4-E15 polygon 36" descr="sci-ppt:o036"/>
+          <p:cNvSpPr/>
           <p:nvPr/>
-        </p:nvCxnSpPr>
-        <p:spPr>
-          <a:xfrm flipV="1">
-            <a:off x="3303270" y="1479287"/>
-            <a:ext cx="76581" cy="34830"/>
-          </a:xfrm>
-          <a:prstGeom prst="line">
+        </p:nvSpPr>
+        <p:spPr>
+          <a:xfrm>
+            <a:off x="8778240" y="2726787"/>
+            <a:ext cx="2926080" cy="1594339"/>
+          </a:xfrm>
+          <a:custGeom>
             <a:avLst/>
-          </a:prstGeom>
-          <a:ln w="25400">
+            <a:gdLst/>
+            <a:ahLst/>
+            <a:cxnLst/>
+            <a:rect l="l" t="t" r="r" b="b"/>
+            <a:pathLst>
+              <a:path w="2926080" h="1594339">
+                <a:moveTo>
+                  <a:pt x="0" y="0"/>
+                </a:moveTo>
+                <a:lnTo>
+                  <a:pt x="29556" y="163"/>
+                </a:lnTo>
+                <a:lnTo>
+                  <a:pt x="59112" y="651"/>
+                </a:lnTo>
+                <a:lnTo>
+                  <a:pt x="88669" y="1464"/>
+                </a:lnTo>
+                <a:lnTo>
+                  <a:pt x="118225" y="2603"/>
+                </a:lnTo>
+                <a:lnTo>
+                  <a:pt x="147781" y="4067"/>
+                </a:lnTo>
+                <a:lnTo>
+                  <a:pt x="177338" y="5856"/>
+                </a:lnTo>
+                <a:lnTo>
+                  <a:pt x="206894" y="7971"/>
+                </a:lnTo>
+                <a:lnTo>
+                  <a:pt x="236450" y="10411"/>
+                </a:lnTo>
+                <a:lnTo>
+                  <a:pt x="266007" y="13177"/>
+                </a:lnTo>
+                <a:lnTo>
+                  <a:pt x="295563" y="16267"/>
+                </a:lnTo>
+                <a:lnTo>
+                  <a:pt x="325120" y="19683"/>
+                </a:lnTo>
+                <a:lnTo>
+                  <a:pt x="354676" y="23425"/>
+                </a:lnTo>
+                <a:lnTo>
+                  <a:pt x="384232" y="27492"/>
+                </a:lnTo>
+                <a:lnTo>
+                  <a:pt x="413789" y="31884"/>
+                </a:lnTo>
+                <a:lnTo>
+                  <a:pt x="443345" y="36601"/>
+                </a:lnTo>
+                <a:lnTo>
+                  <a:pt x="472901" y="41644"/>
+                </a:lnTo>
+                <a:lnTo>
+                  <a:pt x="502458" y="47012"/>
+                </a:lnTo>
+                <a:lnTo>
+                  <a:pt x="532014" y="52706"/>
+                </a:lnTo>
+                <a:lnTo>
+                  <a:pt x="561570" y="58724"/>
+                </a:lnTo>
+                <a:lnTo>
+                  <a:pt x="591127" y="65069"/>
+                </a:lnTo>
+                <a:lnTo>
+                  <a:pt x="620683" y="71738"/>
+                </a:lnTo>
+                <a:lnTo>
+                  <a:pt x="650239" y="78733"/>
+                </a:lnTo>
+                <a:lnTo>
+                  <a:pt x="679796" y="86053"/>
+                </a:lnTo>
+                <a:lnTo>
+                  <a:pt x="709352" y="93699"/>
+                </a:lnTo>
+                <a:lnTo>
+                  <a:pt x="738909" y="101670"/>
+                </a:lnTo>
+                <a:lnTo>
+                  <a:pt x="768465" y="109966"/>
+                </a:lnTo>
+                <a:lnTo>
+                  <a:pt x="798021" y="118587"/>
+                </a:lnTo>
+                <a:lnTo>
+                  <a:pt x="827578" y="127534"/>
+                </a:lnTo>
+                <a:lnTo>
+                  <a:pt x="857134" y="136807"/>
+                </a:lnTo>
+                <a:lnTo>
+                  <a:pt x="886690" y="146404"/>
+                </a:lnTo>
+                <a:lnTo>
+                  <a:pt x="916247" y="156327"/>
+                </a:lnTo>
+                <a:lnTo>
+                  <a:pt x="945803" y="166575"/>
+                </a:lnTo>
+                <a:lnTo>
+                  <a:pt x="975360" y="177149"/>
+                </a:lnTo>
+                <a:lnTo>
+                  <a:pt x="1004916" y="188048"/>
+                </a:lnTo>
+                <a:lnTo>
+                  <a:pt x="1034472" y="199272"/>
+                </a:lnTo>
+                <a:lnTo>
+                  <a:pt x="1064029" y="210822"/>
+                </a:lnTo>
+                <a:lnTo>
+                  <a:pt x="1093585" y="222697"/>
+                </a:lnTo>
+                <a:lnTo>
+                  <a:pt x="1123141" y="234897"/>
+                </a:lnTo>
+                <a:lnTo>
+                  <a:pt x="1152698" y="247423"/>
+                </a:lnTo>
+                <a:lnTo>
+                  <a:pt x="1182254" y="260274"/>
+                </a:lnTo>
+                <a:lnTo>
+                  <a:pt x="1211810" y="273450"/>
+                </a:lnTo>
+                <a:lnTo>
+                  <a:pt x="1241367" y="286952"/>
+                </a:lnTo>
+                <a:lnTo>
+                  <a:pt x="1270923" y="300779"/>
+                </a:lnTo>
+                <a:lnTo>
+                  <a:pt x="1300480" y="314931"/>
+                </a:lnTo>
+                <a:lnTo>
+                  <a:pt x="1330036" y="329409"/>
+                </a:lnTo>
+                <a:lnTo>
+                  <a:pt x="1359592" y="344212"/>
+                </a:lnTo>
+                <a:lnTo>
+                  <a:pt x="1389149" y="359340"/>
+                </a:lnTo>
+                <a:lnTo>
+                  <a:pt x="1418705" y="374794"/>
+                </a:lnTo>
+                <a:lnTo>
+                  <a:pt x="1448261" y="390573"/>
+                </a:lnTo>
+                <a:lnTo>
+                  <a:pt x="1477818" y="406678"/>
+                </a:lnTo>
+                <a:lnTo>
+                  <a:pt x="1507374" y="423107"/>
+                </a:lnTo>
+                <a:lnTo>
+                  <a:pt x="1536930" y="439863"/>
+                </a:lnTo>
+                <a:lnTo>
+                  <a:pt x="1566487" y="456943"/>
+                </a:lnTo>
+                <a:lnTo>
+                  <a:pt x="1596043" y="474349"/>
+                </a:lnTo>
+                <a:lnTo>
+                  <a:pt x="1625600" y="492080"/>
+                </a:lnTo>
+                <a:lnTo>
+                  <a:pt x="1655156" y="510136"/>
+                </a:lnTo>
+                <a:lnTo>
+                  <a:pt x="1684712" y="528518"/>
+                </a:lnTo>
+                <a:lnTo>
+                  <a:pt x="1714269" y="547225"/>
+                </a:lnTo>
+                <a:lnTo>
+                  <a:pt x="1743825" y="566258"/>
+                </a:lnTo>
+                <a:lnTo>
+                  <a:pt x="1773381" y="585616"/>
+                </a:lnTo>
+                <a:lnTo>
+                  <a:pt x="1802938" y="605299"/>
+                </a:lnTo>
+                <a:lnTo>
+                  <a:pt x="1832494" y="625308"/>
+                </a:lnTo>
+                <a:lnTo>
+                  <a:pt x="1862050" y="645641"/>
+                </a:lnTo>
+                <a:lnTo>
+                  <a:pt x="1891607" y="666301"/>
+                </a:lnTo>
+                <a:lnTo>
+                  <a:pt x="1921163" y="687285"/>
+                </a:lnTo>
+                <a:lnTo>
+                  <a:pt x="1950720" y="708595"/>
+                </a:lnTo>
+                <a:lnTo>
+                  <a:pt x="1980276" y="730230"/>
+                </a:lnTo>
+                <a:lnTo>
+                  <a:pt x="2009832" y="752191"/>
+                </a:lnTo>
+                <a:lnTo>
+                  <a:pt x="2039389" y="774477"/>
+                </a:lnTo>
+                <a:lnTo>
+                  <a:pt x="2068945" y="797088"/>
+                </a:lnTo>
+                <a:lnTo>
+                  <a:pt x="2098501" y="820025"/>
+                </a:lnTo>
+                <a:lnTo>
+                  <a:pt x="2128058" y="843287"/>
+                </a:lnTo>
+                <a:lnTo>
+                  <a:pt x="2157614" y="866874"/>
+                </a:lnTo>
+                <a:lnTo>
+                  <a:pt x="2187170" y="890787"/>
+                </a:lnTo>
+                <a:lnTo>
+                  <a:pt x="2216727" y="915025"/>
+                </a:lnTo>
+                <a:lnTo>
+                  <a:pt x="2246283" y="939588"/>
+                </a:lnTo>
+                <a:lnTo>
+                  <a:pt x="2275840" y="964477"/>
+                </a:lnTo>
+                <a:lnTo>
+                  <a:pt x="2305396" y="989691"/>
+                </a:lnTo>
+                <a:lnTo>
+                  <a:pt x="2334952" y="1015230"/>
+                </a:lnTo>
+                <a:lnTo>
+                  <a:pt x="2364509" y="1041095"/>
+                </a:lnTo>
+                <a:lnTo>
+                  <a:pt x="2394065" y="1067285"/>
+                </a:lnTo>
+                <a:lnTo>
+                  <a:pt x="2423621" y="1093800"/>
+                </a:lnTo>
+                <a:lnTo>
+                  <a:pt x="2453178" y="1120641"/>
+                </a:lnTo>
+                <a:lnTo>
+                  <a:pt x="2482734" y="1147807"/>
+                </a:lnTo>
+                <a:lnTo>
+                  <a:pt x="2512290" y="1175298"/>
+                </a:lnTo>
+                <a:lnTo>
+                  <a:pt x="2541847" y="1203115"/>
+                </a:lnTo>
+                <a:lnTo>
+                  <a:pt x="2571403" y="1231257"/>
+                </a:lnTo>
+                <a:lnTo>
+                  <a:pt x="2600960" y="1259724"/>
+                </a:lnTo>
+                <a:lnTo>
+                  <a:pt x="2630516" y="1288517"/>
+                </a:lnTo>
+                <a:lnTo>
+                  <a:pt x="2660072" y="1317635"/>
+                </a:lnTo>
+                <a:lnTo>
+                  <a:pt x="2689629" y="1347079"/>
+                </a:lnTo>
+                <a:lnTo>
+                  <a:pt x="2719185" y="1376848"/>
+                </a:lnTo>
+                <a:lnTo>
+                  <a:pt x="2748741" y="1406942"/>
+                </a:lnTo>
+                <a:lnTo>
+                  <a:pt x="2778298" y="1437361"/>
+                </a:lnTo>
+                <a:lnTo>
+                  <a:pt x="2807854" y="1468106"/>
+                </a:lnTo>
+                <a:lnTo>
+                  <a:pt x="2837410" y="1499176"/>
+                </a:lnTo>
+                <a:lnTo>
+                  <a:pt x="2866967" y="1530572"/>
+                </a:lnTo>
+                <a:lnTo>
+                  <a:pt x="2896523" y="1562292"/>
+                </a:lnTo>
+                <a:lnTo>
+                  <a:pt x="2926080" y="1594339"/>
+                </a:lnTo>
+              </a:path>
+            </a:pathLst>
+          </a:custGeom>
+          <a:noFill/>
+          <a:ln w="33020">
             <a:solidFill>
-              <a:srgbClr val="8EDBD4"/>
+              <a:srgbClr val="F2B880"/>
             </a:solidFill>
           </a:ln>
           <a:effectLst/>
         </p:spPr>
-      </p:cxnSp>
-      <p:cxnSp>
-        <p:nvCxnSpPr>
-          <p:cNvPr id="35" name="C4-E15 line 33" descr="sci-ppt:o033"/>
-          <p:cNvCxnSpPr/>
+        <p:txBody>
+          <a:bodyPr rtlCol="0" anchor="ctr"/>
+          <a:lstStyle/>
+          <a:p>
+            <a:pPr algn="ctr"/>
+          </a:p>
+        </p:txBody>
+      </p:sp>
+      <p:sp>
+        <p:nvSpPr>
+          <p:cNvPr id="39" name="C4-E15 polygon 37" descr="sci-ppt:o037"/>
+          <p:cNvSpPr/>
           <p:nvPr/>
-        </p:nvCxnSpPr>
-        <p:spPr>
-          <a:xfrm flipV="1">
-            <a:off x="3379851" y="1447751"/>
-            <a:ext cx="76581" cy="31536"/>
-          </a:xfrm>
-          <a:prstGeom prst="line">
+        </p:nvSpPr>
+        <p:spPr>
+          <a:xfrm>
+            <a:off x="8778240" y="1929618"/>
+            <a:ext cx="2926080" cy="0"/>
+          </a:xfrm>
+          <a:custGeom>
             <a:avLst/>
-          </a:prstGeom>
-          <a:ln w="25400">
+            <a:gdLst/>
+            <a:ahLst/>
+            <a:cxnLst/>
+            <a:rect l="l" t="t" r="r" b="b"/>
+            <a:pathLst>
+              <a:path w="2926080" h="0">
+                <a:moveTo>
+                  <a:pt x="0" y="0"/>
+                </a:moveTo>
+                <a:lnTo>
+                  <a:pt x="29556" y="0"/>
+                </a:lnTo>
+                <a:lnTo>
+                  <a:pt x="59112" y="0"/>
+                </a:lnTo>
+                <a:lnTo>
+                  <a:pt x="88669" y="0"/>
+                </a:lnTo>
+                <a:lnTo>
+                  <a:pt x="118225" y="0"/>
+                </a:lnTo>
+                <a:lnTo>
+                  <a:pt x="147781" y="0"/>
+                </a:lnTo>
+                <a:lnTo>
+                  <a:pt x="177338" y="0"/>
+                </a:lnTo>
+                <a:lnTo>
+                  <a:pt x="206894" y="0"/>
+                </a:lnTo>
+                <a:lnTo>
+                  <a:pt x="236450" y="0"/>
+                </a:lnTo>
+                <a:lnTo>
+                  <a:pt x="266007" y="0"/>
+                </a:lnTo>
+                <a:lnTo>
+                  <a:pt x="295563" y="0"/>
+                </a:lnTo>
+                <a:lnTo>
+                  <a:pt x="325120" y="0"/>
+                </a:lnTo>
+                <a:lnTo>
+                  <a:pt x="354676" y="0"/>
+                </a:lnTo>
+                <a:lnTo>
+                  <a:pt x="384232" y="0"/>
+                </a:lnTo>
+                <a:lnTo>
+                  <a:pt x="413789" y="0"/>
+                </a:lnTo>
+                <a:lnTo>
+                  <a:pt x="443345" y="0"/>
+                </a:lnTo>
+                <a:lnTo>
+                  <a:pt x="472901" y="0"/>
+                </a:lnTo>
+                <a:lnTo>
+                  <a:pt x="502458" y="0"/>
+                </a:lnTo>
+                <a:lnTo>
+                  <a:pt x="532014" y="0"/>
+                </a:lnTo>
+                <a:lnTo>
+                  <a:pt x="561570" y="0"/>
+                </a:lnTo>
+                <a:lnTo>
+                  <a:pt x="591127" y="0"/>
+                </a:lnTo>
+                <a:lnTo>
+                  <a:pt x="620683" y="0"/>
+                </a:lnTo>
+                <a:lnTo>
+                  <a:pt x="650239" y="0"/>
+                </a:lnTo>
+                <a:lnTo>
+                  <a:pt x="679796" y="0"/>
+                </a:lnTo>
+                <a:lnTo>
+                  <a:pt x="709352" y="0"/>
+                </a:lnTo>
+                <a:lnTo>
+                  <a:pt x="738909" y="0"/>
+                </a:lnTo>
+                <a:lnTo>
+                  <a:pt x="768465" y="0"/>
+                </a:lnTo>
+                <a:lnTo>
+                  <a:pt x="798021" y="0"/>
+                </a:lnTo>
+                <a:lnTo>
+                  <a:pt x="827578" y="0"/>
+                </a:lnTo>
+                <a:lnTo>
+                  <a:pt x="857134" y="0"/>
+                </a:lnTo>
+                <a:lnTo>
+                  <a:pt x="886690" y="0"/>
+                </a:lnTo>
+                <a:lnTo>
+                  <a:pt x="916247" y="0"/>
+                </a:lnTo>
+                <a:lnTo>
+                  <a:pt x="945803" y="0"/>
+                </a:lnTo>
+                <a:lnTo>
+                  <a:pt x="975360" y="0"/>
+                </a:lnTo>
+                <a:lnTo>
+                  <a:pt x="1004916" y="0"/>
+                </a:lnTo>
+                <a:lnTo>
+                  <a:pt x="1034472" y="0"/>
+                </a:lnTo>
+                <a:lnTo>
+                  <a:pt x="1064029" y="0"/>
+                </a:lnTo>
+                <a:lnTo>
+                  <a:pt x="1093585" y="0"/>
+                </a:lnTo>
+                <a:lnTo>
+                  <a:pt x="1123141" y="0"/>
+                </a:lnTo>
+                <a:lnTo>
+                  <a:pt x="1152698" y="0"/>
+                </a:lnTo>
+                <a:lnTo>
+                  <a:pt x="1182254" y="0"/>
+                </a:lnTo>
+                <a:lnTo>
+                  <a:pt x="1211810" y="0"/>
+                </a:lnTo>
+                <a:lnTo>
+                  <a:pt x="1241367" y="0"/>
+                </a:lnTo>
+                <a:lnTo>
+                  <a:pt x="1270923" y="0"/>
+                </a:lnTo>
+                <a:lnTo>
+                  <a:pt x="1300480" y="0"/>
+                </a:lnTo>
+                <a:lnTo>
+                  <a:pt x="1330036" y="0"/>
+                </a:lnTo>
+                <a:lnTo>
+                  <a:pt x="1359592" y="0"/>
+                </a:lnTo>
+                <a:lnTo>
+                  <a:pt x="1389149" y="0"/>
+                </a:lnTo>
+                <a:lnTo>
+                  <a:pt x="1418705" y="0"/>
+                </a:lnTo>
+                <a:lnTo>
+                  <a:pt x="1448261" y="0"/>
+                </a:lnTo>
+                <a:lnTo>
+                  <a:pt x="1477818" y="0"/>
+                </a:lnTo>
+                <a:lnTo>
+                  <a:pt x="1507374" y="0"/>
+                </a:lnTo>
+                <a:lnTo>
+                  <a:pt x="1536930" y="0"/>
+                </a:lnTo>
+                <a:lnTo>
+                  <a:pt x="1566487" y="0"/>
+                </a:lnTo>
+                <a:lnTo>
+                  <a:pt x="1596043" y="0"/>
+                </a:lnTo>
+                <a:lnTo>
+                  <a:pt x="1625600" y="0"/>
+                </a:lnTo>
+                <a:lnTo>
+                  <a:pt x="1655156" y="0"/>
+                </a:lnTo>
+                <a:lnTo>
+                  <a:pt x="1684712" y="0"/>
+                </a:lnTo>
+                <a:lnTo>
+                  <a:pt x="1714269" y="0"/>
+                </a:lnTo>
+                <a:lnTo>
+                  <a:pt x="1743825" y="0"/>
+                </a:lnTo>
+                <a:lnTo>
+                  <a:pt x="1773381" y="0"/>
+                </a:lnTo>
+                <a:lnTo>
+                  <a:pt x="1802938" y="0"/>
+                </a:lnTo>
+                <a:lnTo>
+                  <a:pt x="1832494" y="0"/>
+                </a:lnTo>
+                <a:lnTo>
+                  <a:pt x="1862050" y="0"/>
+                </a:lnTo>
+                <a:lnTo>
+                  <a:pt x="1891607" y="0"/>
+                </a:lnTo>
+                <a:lnTo>
+                  <a:pt x="1921163" y="0"/>
+                </a:lnTo>
+                <a:lnTo>
+                  <a:pt x="1950720" y="0"/>
+                </a:lnTo>
+                <a:lnTo>
+                  <a:pt x="1980276" y="0"/>
+                </a:lnTo>
+                <a:lnTo>
+                  <a:pt x="2009832" y="0"/>
+                </a:lnTo>
+                <a:lnTo>
+                  <a:pt x="2039389" y="0"/>
+                </a:lnTo>
+                <a:lnTo>
+                  <a:pt x="2068945" y="0"/>
+                </a:lnTo>
+                <a:lnTo>
+                  <a:pt x="2098501" y="0"/>
+                </a:lnTo>
+                <a:lnTo>
+                  <a:pt x="2128058" y="0"/>
+                </a:lnTo>
+                <a:lnTo>
+                  <a:pt x="2157614" y="0"/>
+                </a:lnTo>
+                <a:lnTo>
+                  <a:pt x="2187170" y="0"/>
+                </a:lnTo>
+                <a:lnTo>
+                  <a:pt x="2216727" y="0"/>
+                </a:lnTo>
+                <a:lnTo>
+                  <a:pt x="2246283" y="0"/>
+                </a:lnTo>
+                <a:lnTo>
+                  <a:pt x="2275840" y="0"/>
+                </a:lnTo>
+                <a:lnTo>
+                  <a:pt x="2305396" y="0"/>
+                </a:lnTo>
+                <a:lnTo>
+                  <a:pt x="2334952" y="0"/>
+                </a:lnTo>
+                <a:lnTo>
+                  <a:pt x="2364509" y="0"/>
+                </a:lnTo>
+                <a:lnTo>
+                  <a:pt x="2394065" y="0"/>
+                </a:lnTo>
+                <a:lnTo>
+                  <a:pt x="2423621" y="0"/>
+                </a:lnTo>
+                <a:lnTo>
+                  <a:pt x="2453178" y="0"/>
+                </a:lnTo>
+                <a:lnTo>
+                  <a:pt x="2482734" y="0"/>
+                </a:lnTo>
+                <a:lnTo>
+                  <a:pt x="2512290" y="0"/>
+                </a:lnTo>
+                <a:lnTo>
+                  <a:pt x="2541847" y="0"/>
+                </a:lnTo>
+                <a:lnTo>
+                  <a:pt x="2571403" y="0"/>
+                </a:lnTo>
+                <a:lnTo>
+                  <a:pt x="2600960" y="0"/>
+                </a:lnTo>
+                <a:lnTo>
+                  <a:pt x="2630516" y="0"/>
+                </a:lnTo>
+                <a:lnTo>
+                  <a:pt x="2660072" y="0"/>
+                </a:lnTo>
+                <a:lnTo>
+                  <a:pt x="2689629" y="0"/>
+                </a:lnTo>
+                <a:lnTo>
+                  <a:pt x="2719185" y="0"/>
+                </a:lnTo>
+                <a:lnTo>
+                  <a:pt x="2748741" y="0"/>
+                </a:lnTo>
+                <a:lnTo>
+                  <a:pt x="2778298" y="0"/>
+                </a:lnTo>
+                <a:lnTo>
+                  <a:pt x="2807854" y="0"/>
+                </a:lnTo>
+                <a:lnTo>
+                  <a:pt x="2837410" y="0"/>
+                </a:lnTo>
+                <a:lnTo>
+                  <a:pt x="2866967" y="0"/>
+                </a:lnTo>
+                <a:lnTo>
+                  <a:pt x="2896523" y="0"/>
+                </a:lnTo>
+                <a:lnTo>
+                  <a:pt x="2926080" y="0"/>
+                </a:lnTo>
+              </a:path>
+            </a:pathLst>
+          </a:custGeom>
+          <a:noFill/>
+          <a:ln w="33020">
             <a:solidFill>
-              <a:srgbClr val="8EDBD4"/>
+              <a:srgbClr val="F28BA0"/>
             </a:solidFill>
           </a:ln>
           <a:effectLst/>
         </p:spPr>
-      </p:cxnSp>
-      <p:cxnSp>
-        <p:nvCxnSpPr>
-          <p:cNvPr id="36" name="C4-E15 line 34" descr="sci-ppt:o034"/>
-          <p:cNvCxnSpPr/>
+        <p:txBody>
+          <a:bodyPr rtlCol="0" anchor="ctr"/>
+          <a:lstStyle/>
+          <a:p>
+            <a:pPr algn="ctr"/>
+          </a:p>
+        </p:txBody>
+      </p:sp>
+      <p:sp>
+        <p:nvSpPr>
+          <p:cNvPr id="40" name="C4-E15 polygon 38" descr="sci-ppt:o038"/>
+          <p:cNvSpPr/>
           <p:nvPr/>
-        </p:nvCxnSpPr>
-        <p:spPr>
-          <a:xfrm flipV="1">
-            <a:off x="3456432" y="1419633"/>
-            <a:ext cx="76581" cy="28118"/>
-          </a:xfrm>
-          <a:prstGeom prst="line">
+        </p:nvSpPr>
+        <p:spPr>
+          <a:xfrm>
+            <a:off x="8778240" y="1929618"/>
+            <a:ext cx="2926080" cy="797169"/>
+          </a:xfrm>
+          <a:custGeom>
             <a:avLst/>
-          </a:prstGeom>
-          <a:ln w="25400">
+            <a:gdLst/>
+            <a:ahLst/>
+            <a:cxnLst/>
+            <a:rect l="l" t="t" r="r" b="b"/>
+            <a:pathLst>
+              <a:path w="2926080" h="797169">
+                <a:moveTo>
+                  <a:pt x="0" y="0"/>
+                </a:moveTo>
+                <a:lnTo>
+                  <a:pt x="29556" y="163"/>
+                </a:lnTo>
+                <a:lnTo>
+                  <a:pt x="59112" y="651"/>
+                </a:lnTo>
+                <a:lnTo>
+                  <a:pt x="88669" y="1463"/>
+                </a:lnTo>
+                <a:lnTo>
+                  <a:pt x="118225" y="2601"/>
+                </a:lnTo>
+                <a:lnTo>
+                  <a:pt x="147781" y="4062"/>
+                </a:lnTo>
+                <a:lnTo>
+                  <a:pt x="177338" y="5845"/>
+                </a:lnTo>
+                <a:lnTo>
+                  <a:pt x="206894" y="7951"/>
+                </a:lnTo>
+                <a:lnTo>
+                  <a:pt x="236450" y="10377"/>
+                </a:lnTo>
+                <a:lnTo>
+                  <a:pt x="266007" y="13122"/>
+                </a:lnTo>
+                <a:lnTo>
+                  <a:pt x="295563" y="16184"/>
+                </a:lnTo>
+                <a:lnTo>
+                  <a:pt x="325120" y="19562"/>
+                </a:lnTo>
+                <a:lnTo>
+                  <a:pt x="354676" y="23253"/>
+                </a:lnTo>
+                <a:lnTo>
+                  <a:pt x="384232" y="27254"/>
+                </a:lnTo>
+                <a:lnTo>
+                  <a:pt x="413789" y="31565"/>
+                </a:lnTo>
+                <a:lnTo>
+                  <a:pt x="443345" y="36181"/>
+                </a:lnTo>
+                <a:lnTo>
+                  <a:pt x="472901" y="41100"/>
+                </a:lnTo>
+                <a:lnTo>
+                  <a:pt x="502458" y="46319"/>
+                </a:lnTo>
+                <a:lnTo>
+                  <a:pt x="532014" y="51834"/>
+                </a:lnTo>
+                <a:lnTo>
+                  <a:pt x="561570" y="57643"/>
+                </a:lnTo>
+                <a:lnTo>
+                  <a:pt x="591127" y="63741"/>
+                </a:lnTo>
+                <a:lnTo>
+                  <a:pt x="620683" y="70124"/>
+                </a:lnTo>
+                <a:lnTo>
+                  <a:pt x="650239" y="76789"/>
+                </a:lnTo>
+                <a:lnTo>
+                  <a:pt x="679796" y="83731"/>
+                </a:lnTo>
+                <a:lnTo>
+                  <a:pt x="709352" y="90945"/>
+                </a:lnTo>
+                <a:lnTo>
+                  <a:pt x="738909" y="98428"/>
+                </a:lnTo>
+                <a:lnTo>
+                  <a:pt x="768465" y="106173"/>
+                </a:lnTo>
+                <a:lnTo>
+                  <a:pt x="798021" y="114177"/>
+                </a:lnTo>
+                <a:lnTo>
+                  <a:pt x="827578" y="122433"/>
+                </a:lnTo>
+                <a:lnTo>
+                  <a:pt x="857134" y="130937"/>
+                </a:lnTo>
+                <a:lnTo>
+                  <a:pt x="886690" y="139682"/>
+                </a:lnTo>
+                <a:lnTo>
+                  <a:pt x="916247" y="148663"/>
+                </a:lnTo>
+                <a:lnTo>
+                  <a:pt x="945803" y="157873"/>
+                </a:lnTo>
+                <a:lnTo>
+                  <a:pt x="975360" y="167307"/>
+                </a:lnTo>
+                <a:lnTo>
+                  <a:pt x="1004916" y="176958"/>
+                </a:lnTo>
+                <a:lnTo>
+                  <a:pt x="1034472" y="186819"/>
+                </a:lnTo>
+                <a:lnTo>
+                  <a:pt x="1064029" y="196883"/>
+                </a:lnTo>
+                <a:lnTo>
+                  <a:pt x="1093585" y="207143"/>
+                </a:lnTo>
+                <a:lnTo>
+                  <a:pt x="1123141" y="217593"/>
+                </a:lnTo>
+                <a:lnTo>
+                  <a:pt x="1152698" y="228224"/>
+                </a:lnTo>
+                <a:lnTo>
+                  <a:pt x="1182254" y="239029"/>
+                </a:lnTo>
+                <a:lnTo>
+                  <a:pt x="1211810" y="250000"/>
+                </a:lnTo>
+                <a:lnTo>
+                  <a:pt x="1241367" y="261129"/>
+                </a:lnTo>
+                <a:lnTo>
+                  <a:pt x="1270923" y="272407"/>
+                </a:lnTo>
+                <a:lnTo>
+                  <a:pt x="1300480" y="283827"/>
+                </a:lnTo>
+                <a:lnTo>
+                  <a:pt x="1330036" y="295379"/>
+                </a:lnTo>
+                <a:lnTo>
+                  <a:pt x="1359592" y="307055"/>
+                </a:lnTo>
+                <a:lnTo>
+                  <a:pt x="1389149" y="318845"/>
+                </a:lnTo>
+                <a:lnTo>
+                  <a:pt x="1418705" y="330741"/>
+                </a:lnTo>
+                <a:lnTo>
+                  <a:pt x="1448261" y="342733"/>
+                </a:lnTo>
+                <a:lnTo>
+                  <a:pt x="1477818" y="354811"/>
+                </a:lnTo>
+                <a:lnTo>
+                  <a:pt x="1507374" y="366965"/>
+                </a:lnTo>
+                <a:lnTo>
+                  <a:pt x="1536930" y="379185"/>
+                </a:lnTo>
+                <a:lnTo>
+                  <a:pt x="1566487" y="391462"/>
+                </a:lnTo>
+                <a:lnTo>
+                  <a:pt x="1596043" y="403784"/>
+                </a:lnTo>
+                <a:lnTo>
+                  <a:pt x="1625600" y="416141"/>
+                </a:lnTo>
+                <a:lnTo>
+                  <a:pt x="1655156" y="428523"/>
+                </a:lnTo>
+                <a:lnTo>
+                  <a:pt x="1684712" y="440917"/>
+                </a:lnTo>
+                <a:lnTo>
+                  <a:pt x="1714269" y="453313"/>
+                </a:lnTo>
+                <a:lnTo>
+                  <a:pt x="1743825" y="465699"/>
+                </a:lnTo>
+                <a:lnTo>
+                  <a:pt x="1773381" y="478064"/>
+                </a:lnTo>
+                <a:lnTo>
+                  <a:pt x="1802938" y="490396"/>
+                </a:lnTo>
+                <a:lnTo>
+                  <a:pt x="1832494" y="502683"/>
+                </a:lnTo>
+                <a:lnTo>
+                  <a:pt x="1862050" y="514912"/>
+                </a:lnTo>
+                <a:lnTo>
+                  <a:pt x="1891607" y="527071"/>
+                </a:lnTo>
+                <a:lnTo>
+                  <a:pt x="1921163" y="539148"/>
+                </a:lnTo>
+                <a:lnTo>
+                  <a:pt x="1950720" y="551129"/>
+                </a:lnTo>
+                <a:lnTo>
+                  <a:pt x="1980276" y="563002"/>
+                </a:lnTo>
+                <a:lnTo>
+                  <a:pt x="2009832" y="574753"/>
+                </a:lnTo>
+                <a:lnTo>
+                  <a:pt x="2039389" y="586369"/>
+                </a:lnTo>
+                <a:lnTo>
+                  <a:pt x="2068945" y="597836"/>
+                </a:lnTo>
+                <a:lnTo>
+                  <a:pt x="2098501" y="609141"/>
+                </a:lnTo>
+                <a:lnTo>
+                  <a:pt x="2128058" y="620269"/>
+                </a:lnTo>
+                <a:lnTo>
+                  <a:pt x="2157614" y="631205"/>
+                </a:lnTo>
+                <a:lnTo>
+                  <a:pt x="2187170" y="641937"/>
+                </a:lnTo>
+                <a:lnTo>
+                  <a:pt x="2216727" y="652448"/>
+                </a:lnTo>
+                <a:lnTo>
+                  <a:pt x="2246283" y="662725"/>
+                </a:lnTo>
+                <a:lnTo>
+                  <a:pt x="2275840" y="672752"/>
+                </a:lnTo>
+                <a:lnTo>
+                  <a:pt x="2305396" y="682514"/>
+                </a:lnTo>
+                <a:lnTo>
+                  <a:pt x="2334952" y="691995"/>
+                </a:lnTo>
+                <a:lnTo>
+                  <a:pt x="2364509" y="701180"/>
+                </a:lnTo>
+                <a:lnTo>
+                  <a:pt x="2394065" y="710053"/>
+                </a:lnTo>
+                <a:lnTo>
+                  <a:pt x="2423621" y="718598"/>
+                </a:lnTo>
+                <a:lnTo>
+                  <a:pt x="2453178" y="726798"/>
+                </a:lnTo>
+                <a:lnTo>
+                  <a:pt x="2482734" y="734638"/>
+                </a:lnTo>
+                <a:lnTo>
+                  <a:pt x="2512290" y="742101"/>
+                </a:lnTo>
+                <a:lnTo>
+                  <a:pt x="2541847" y="749169"/>
+                </a:lnTo>
+                <a:lnTo>
+                  <a:pt x="2571403" y="755827"/>
+                </a:lnTo>
+                <a:lnTo>
+                  <a:pt x="2600960" y="762055"/>
+                </a:lnTo>
+                <a:lnTo>
+                  <a:pt x="2630516" y="767838"/>
+                </a:lnTo>
+                <a:lnTo>
+                  <a:pt x="2660072" y="773158"/>
+                </a:lnTo>
+                <a:lnTo>
+                  <a:pt x="2689629" y="777996"/>
+                </a:lnTo>
+                <a:lnTo>
+                  <a:pt x="2719185" y="782335"/>
+                </a:lnTo>
+                <a:lnTo>
+                  <a:pt x="2748741" y="786156"/>
+                </a:lnTo>
+                <a:lnTo>
+                  <a:pt x="2778298" y="789441"/>
+                </a:lnTo>
+                <a:lnTo>
+                  <a:pt x="2807854" y="792172"/>
+                </a:lnTo>
+                <a:lnTo>
+                  <a:pt x="2837410" y="794329"/>
+                </a:lnTo>
+                <a:lnTo>
+                  <a:pt x="2866967" y="795894"/>
+                </a:lnTo>
+                <a:lnTo>
+                  <a:pt x="2896523" y="796847"/>
+                </a:lnTo>
+                <a:lnTo>
+                  <a:pt x="2926080" y="797169"/>
+                </a:lnTo>
+              </a:path>
+            </a:pathLst>
+          </a:custGeom>
+          <a:noFill/>
+          <a:ln w="27940">
             <a:solidFill>
-              <a:srgbClr val="8EDBD4"/>
+              <a:srgbClr val="E7F0F3"/>
             </a:solidFill>
+            <a:prstDash val="dash"/>
           </a:ln>
           <a:effectLst/>
         </p:spPr>
-      </p:cxnSp>
-      <p:cxnSp>
-        <p:nvCxnSpPr>
-          <p:cNvPr id="37" name="C4-E15 line 35" descr="sci-ppt:o035"/>
-          <p:cNvCxnSpPr/>
-          <p:nvPr/>
-        </p:nvCxnSpPr>
-        <p:spPr>
-          <a:xfrm flipV="1">
-            <a:off x="3533013" y="1395044"/>
-            <a:ext cx="76581" cy="24589"/>
-          </a:xfrm>
-          <a:prstGeom prst="line">
-            <a:avLst/>
-          </a:prstGeom>
-          <a:ln w="25400">
-            <a:solidFill>
-              <a:srgbClr val="8EDBD4"/>
-            </a:solidFill>
-          </a:ln>
-          <a:effectLst/>
-        </p:spPr>
-      </p:cxnSp>
-      <p:cxnSp>
-        <p:nvCxnSpPr>
-          <p:cNvPr id="38" name="C4-E15 line 36" descr="sci-ppt:o036"/>
-          <p:cNvCxnSpPr/>
-          <p:nvPr/>
-        </p:nvCxnSpPr>
-        <p:spPr>
-          <a:xfrm flipV="1">
-            <a:off x="3609594" y="1374077"/>
-            <a:ext cx="76581" cy="20967"/>
-          </a:xfrm>
-          <a:prstGeom prst="line">
-            <a:avLst/>
-          </a:prstGeom>
-          <a:ln w="25400">
-            <a:solidFill>
-              <a:srgbClr val="8EDBD4"/>
-            </a:solidFill>
-          </a:ln>
-          <a:effectLst/>
-        </p:spPr>
-      </p:cxnSp>
-      <p:cxnSp>
-        <p:nvCxnSpPr>
-          <p:cNvPr id="39" name="C4-E15 line 37" descr="sci-ppt:o037"/>
-          <p:cNvCxnSpPr/>
-          <p:nvPr/>
-        </p:nvCxnSpPr>
-        <p:spPr>
-          <a:xfrm flipV="1">
-            <a:off x="3686175" y="1356814"/>
-            <a:ext cx="76581" cy="17263"/>
-          </a:xfrm>
-          <a:prstGeom prst="line">
-            <a:avLst/>
-          </a:prstGeom>
-          <a:ln w="25400">
-            <a:solidFill>
-              <a:srgbClr val="8EDBD4"/>
-            </a:solidFill>
-          </a:ln>
-          <a:effectLst/>
-        </p:spPr>
-      </p:cxnSp>
-      <p:cxnSp>
-        <p:nvCxnSpPr>
-          <p:cNvPr id="40" name="C4-E15 line 38" descr="sci-ppt:o038"/>
-          <p:cNvCxnSpPr/>
-          <p:nvPr/>
-        </p:nvCxnSpPr>
-        <p:spPr>
-          <a:xfrm flipV="1">
-            <a:off x="3762756" y="1343318"/>
-            <a:ext cx="76581" cy="13496"/>
-          </a:xfrm>
-          <a:prstGeom prst="line">
-            <a:avLst/>
-          </a:prstGeom>
-          <a:ln w="25400">
-            <a:solidFill>
-              <a:srgbClr val="8EDBD4"/>
-            </a:solidFill>
-          </a:ln>
-          <a:effectLst/>
-        </p:spPr>
-      </p:cxnSp>
-      <p:cxnSp>
-        <p:nvCxnSpPr>
-          <p:cNvPr id="41" name="C4-E15 line 39" descr="sci-ppt:o039"/>
-          <p:cNvCxnSpPr/>
-          <p:nvPr/>
-        </p:nvCxnSpPr>
-        <p:spPr>
-          <a:xfrm flipV="1">
-            <a:off x="3839337" y="1333642"/>
-            <a:ext cx="76581" cy="9676"/>
-          </a:xfrm>
-          <a:prstGeom prst="line">
-            <a:avLst/>
-          </a:prstGeom>
-          <a:ln w="25400">
-            <a:solidFill>
-              <a:srgbClr val="8EDBD4"/>
-            </a:solidFill>
-          </a:ln>
-          <a:effectLst/>
-        </p:spPr>
-      </p:cxnSp>
-      <p:cxnSp>
-        <p:nvCxnSpPr>
-          <p:cNvPr id="42" name="C4-E15 line 40" descr="sci-ppt:o040"/>
-          <p:cNvCxnSpPr/>
-          <p:nvPr/>
-        </p:nvCxnSpPr>
-        <p:spPr>
-          <a:xfrm flipV="1">
-            <a:off x="3915918" y="1327822"/>
-            <a:ext cx="76581" cy="5820"/>
-          </a:xfrm>
-          <a:prstGeom prst="line">
-            <a:avLst/>
-          </a:prstGeom>
-          <a:ln w="25400">
-            <a:solidFill>
-              <a:srgbClr val="8EDBD4"/>
-            </a:solidFill>
-          </a:ln>
-          <a:effectLst/>
-        </p:spPr>
-      </p:cxnSp>
-      <p:cxnSp>
-        <p:nvCxnSpPr>
-          <p:cNvPr id="43" name="C4-E15 line 41" descr="sci-ppt:o041"/>
-          <p:cNvCxnSpPr/>
-          <p:nvPr/>
-        </p:nvCxnSpPr>
-        <p:spPr>
-          <a:xfrm flipV="1">
-            <a:off x="3992499" y="1325880"/>
-            <a:ext cx="76581" cy="1942"/>
-          </a:xfrm>
-          <a:prstGeom prst="line">
-            <a:avLst/>
-          </a:prstGeom>
-          <a:ln w="25400">
-            <a:solidFill>
-              <a:srgbClr val="8EDBD4"/>
-            </a:solidFill>
-          </a:ln>
-          <a:effectLst/>
-        </p:spPr>
-      </p:cxnSp>
-      <p:cxnSp>
-        <p:nvCxnSpPr>
-          <p:cNvPr id="44" name="C4-E15 line 42" descr="sci-ppt:o042"/>
-          <p:cNvCxnSpPr/>
-          <p:nvPr/>
-        </p:nvCxnSpPr>
-        <p:spPr>
-          <a:xfrm>
-            <a:off x="4069080" y="1325880"/>
-            <a:ext cx="76580" cy="1942"/>
-          </a:xfrm>
-          <a:prstGeom prst="line">
-            <a:avLst/>
-          </a:prstGeom>
-          <a:ln w="25400">
-            <a:solidFill>
-              <a:srgbClr val="8EDBD4"/>
-            </a:solidFill>
-          </a:ln>
-          <a:effectLst/>
-        </p:spPr>
-      </p:cxnSp>
-      <p:cxnSp>
-        <p:nvCxnSpPr>
-          <p:cNvPr id="45" name="C4-E15 line 43" descr="sci-ppt:o043"/>
-          <p:cNvCxnSpPr/>
-          <p:nvPr/>
-        </p:nvCxnSpPr>
-        <p:spPr>
-          <a:xfrm>
-            <a:off x="4145660" y="1327822"/>
-            <a:ext cx="76582" cy="5820"/>
-          </a:xfrm>
-          <a:prstGeom prst="line">
-            <a:avLst/>
-          </a:prstGeom>
-          <a:ln w="25400">
-            <a:solidFill>
-              <a:srgbClr val="8EDBD4"/>
-            </a:solidFill>
-          </a:ln>
-          <a:effectLst/>
-        </p:spPr>
-      </p:cxnSp>
-      <p:cxnSp>
-        <p:nvCxnSpPr>
-          <p:cNvPr id="46" name="C4-E15 line 44" descr="sci-ppt:o044"/>
-          <p:cNvCxnSpPr/>
-          <p:nvPr/>
-        </p:nvCxnSpPr>
-        <p:spPr>
-          <a:xfrm>
-            <a:off x="4222242" y="1333642"/>
-            <a:ext cx="76581" cy="9676"/>
-          </a:xfrm>
-          <a:prstGeom prst="line">
-            <a:avLst/>
-          </a:prstGeom>
-          <a:ln w="25400">
-            <a:solidFill>
-              <a:srgbClr val="8EDBD4"/>
-            </a:solidFill>
-          </a:ln>
-          <a:effectLst/>
-        </p:spPr>
-      </p:cxnSp>
-      <p:cxnSp>
-        <p:nvCxnSpPr>
-          <p:cNvPr id="47" name="C4-E15 line 45" descr="sci-ppt:o045"/>
-          <p:cNvCxnSpPr/>
-          <p:nvPr/>
-        </p:nvCxnSpPr>
-        <p:spPr>
-          <a:xfrm>
-            <a:off x="4298823" y="1343318"/>
-            <a:ext cx="76581" cy="13496"/>
-          </a:xfrm>
-          <a:prstGeom prst="line">
-            <a:avLst/>
-          </a:prstGeom>
-          <a:ln w="25400">
-            <a:solidFill>
-              <a:srgbClr val="8EDBD4"/>
-            </a:solidFill>
-          </a:ln>
-          <a:effectLst/>
-        </p:spPr>
-      </p:cxnSp>
-      <p:cxnSp>
-        <p:nvCxnSpPr>
-          <p:cNvPr id="48" name="C4-E15 line 46" descr="sci-ppt:o046"/>
-          <p:cNvCxnSpPr/>
-          <p:nvPr/>
-        </p:nvCxnSpPr>
-        <p:spPr>
-          <a:xfrm>
-            <a:off x="4375404" y="1356814"/>
-            <a:ext cx="76581" cy="17263"/>
-          </a:xfrm>
-          <a:prstGeom prst="line">
-            <a:avLst/>
-          </a:prstGeom>
-          <a:ln w="25400">
-            <a:solidFill>
-              <a:srgbClr val="8EDBD4"/>
-            </a:solidFill>
-          </a:ln>
-          <a:effectLst/>
-        </p:spPr>
-      </p:cxnSp>
-      <p:cxnSp>
-        <p:nvCxnSpPr>
-          <p:cNvPr id="49" name="C4-E15 line 47" descr="sci-ppt:o047"/>
-          <p:cNvCxnSpPr/>
-          <p:nvPr/>
-        </p:nvCxnSpPr>
-        <p:spPr>
-          <a:xfrm>
-            <a:off x="4451985" y="1374077"/>
-            <a:ext cx="76581" cy="20967"/>
-          </a:xfrm>
-          <a:prstGeom prst="line">
-            <a:avLst/>
-          </a:prstGeom>
-          <a:ln w="25400">
-            <a:solidFill>
-              <a:srgbClr val="8EDBD4"/>
-            </a:solidFill>
-          </a:ln>
-          <a:effectLst/>
-        </p:spPr>
-      </p:cxnSp>
-      <p:cxnSp>
-        <p:nvCxnSpPr>
-          <p:cNvPr id="50" name="C4-E15 line 48" descr="sci-ppt:o048"/>
-          <p:cNvCxnSpPr/>
-          <p:nvPr/>
-        </p:nvCxnSpPr>
-        <p:spPr>
-          <a:xfrm>
-            <a:off x="4528566" y="1395044"/>
-            <a:ext cx="76581" cy="24589"/>
-          </a:xfrm>
-          <a:prstGeom prst="line">
-            <a:avLst/>
-          </a:prstGeom>
-          <a:ln w="25400">
-            <a:solidFill>
-              <a:srgbClr val="8EDBD4"/>
-            </a:solidFill>
-          </a:ln>
-          <a:effectLst/>
-        </p:spPr>
-      </p:cxnSp>
-      <p:cxnSp>
-        <p:nvCxnSpPr>
-          <p:cNvPr id="51" name="C4-E15 line 49" descr="sci-ppt:o049"/>
-          <p:cNvCxnSpPr/>
-          <p:nvPr/>
-        </p:nvCxnSpPr>
-        <p:spPr>
-          <a:xfrm>
-            <a:off x="4605147" y="1419633"/>
-            <a:ext cx="76581" cy="28118"/>
-          </a:xfrm>
-          <a:prstGeom prst="line">
-            <a:avLst/>
-          </a:prstGeom>
-          <a:ln w="25400">
-            <a:solidFill>
-              <a:srgbClr val="8EDBD4"/>
-            </a:solidFill>
-          </a:ln>
-          <a:effectLst/>
-        </p:spPr>
-      </p:cxnSp>
-      <p:cxnSp>
-        <p:nvCxnSpPr>
-          <p:cNvPr id="52" name="C4-E15 line 50" descr="sci-ppt:o050"/>
-          <p:cNvCxnSpPr/>
-          <p:nvPr/>
-        </p:nvCxnSpPr>
-        <p:spPr>
-          <a:xfrm>
-            <a:off x="4681728" y="1447751"/>
-            <a:ext cx="76580" cy="31536"/>
-          </a:xfrm>
-          <a:prstGeom prst="line">
-            <a:avLst/>
-          </a:prstGeom>
-          <a:ln w="25400">
-            <a:solidFill>
-              <a:srgbClr val="8EDBD4"/>
-            </a:solidFill>
-          </a:ln>
-          <a:effectLst/>
-        </p:spPr>
-      </p:cxnSp>
-      <p:cxnSp>
-        <p:nvCxnSpPr>
-          <p:cNvPr id="53" name="C4-E15 line 51" descr="sci-ppt:o051"/>
-          <p:cNvCxnSpPr/>
-          <p:nvPr/>
-        </p:nvCxnSpPr>
-        <p:spPr>
-          <a:xfrm>
-            <a:off x="4758308" y="1479287"/>
-            <a:ext cx="76582" cy="34830"/>
-          </a:xfrm>
-          <a:prstGeom prst="line">
-            <a:avLst/>
-          </a:prstGeom>
-          <a:ln w="25400">
-            <a:solidFill>
-              <a:srgbClr val="8EDBD4"/>
-            </a:solidFill>
-          </a:ln>
-          <a:effectLst/>
-        </p:spPr>
-      </p:cxnSp>
-      <p:cxnSp>
-        <p:nvCxnSpPr>
-          <p:cNvPr id="54" name="C4-E15 line 52" descr="sci-ppt:o052"/>
-          <p:cNvCxnSpPr/>
-          <p:nvPr/>
-        </p:nvCxnSpPr>
-        <p:spPr>
-          <a:xfrm>
-            <a:off x="4834890" y="1514117"/>
-            <a:ext cx="76581" cy="37987"/>
-          </a:xfrm>
-          <a:prstGeom prst="line">
-            <a:avLst/>
-          </a:prstGeom>
-          <a:ln w="25400">
-            <a:solidFill>
-              <a:srgbClr val="8EDBD4"/>
-            </a:solidFill>
-          </a:ln>
-          <a:effectLst/>
-        </p:spPr>
-      </p:cxnSp>
-      <p:cxnSp>
-        <p:nvCxnSpPr>
-          <p:cNvPr id="55" name="C4-E15 line 53" descr="sci-ppt:o053"/>
-          <p:cNvCxnSpPr/>
-          <p:nvPr/>
-        </p:nvCxnSpPr>
-        <p:spPr>
-          <a:xfrm>
-            <a:off x="4911471" y="1552104"/>
-            <a:ext cx="76581" cy="40991"/>
-          </a:xfrm>
-          <a:prstGeom prst="line">
-            <a:avLst/>
-          </a:prstGeom>
-          <a:ln w="25400">
-            <a:solidFill>
-              <a:srgbClr val="8EDBD4"/>
-            </a:solidFill>
-          </a:ln>
-          <a:effectLst/>
-        </p:spPr>
-      </p:cxnSp>
-      <p:cxnSp>
-        <p:nvCxnSpPr>
-          <p:cNvPr id="56" name="C4-E15 line 54" descr="sci-ppt:o054"/>
-          <p:cNvCxnSpPr/>
-          <p:nvPr/>
-        </p:nvCxnSpPr>
-        <p:spPr>
-          <a:xfrm>
-            <a:off x="4988052" y="1593095"/>
-            <a:ext cx="76581" cy="43826"/>
-          </a:xfrm>
-          <a:prstGeom prst="line">
-            <a:avLst/>
-          </a:prstGeom>
-          <a:ln w="25400">
-            <a:solidFill>
-              <a:srgbClr val="8EDBD4"/>
-            </a:solidFill>
-          </a:ln>
-          <a:effectLst/>
-        </p:spPr>
-      </p:cxnSp>
-      <p:cxnSp>
-        <p:nvCxnSpPr>
-          <p:cNvPr id="57" name="C4-E15 line 55" descr="sci-ppt:o055"/>
-          <p:cNvCxnSpPr/>
-          <p:nvPr/>
-        </p:nvCxnSpPr>
-        <p:spPr>
-          <a:xfrm>
-            <a:off x="5064633" y="1636921"/>
-            <a:ext cx="76581" cy="46479"/>
-          </a:xfrm>
-          <a:prstGeom prst="line">
-            <a:avLst/>
-          </a:prstGeom>
-          <a:ln w="25400">
-            <a:solidFill>
-              <a:srgbClr val="8EDBD4"/>
-            </a:solidFill>
-          </a:ln>
-          <a:effectLst/>
-        </p:spPr>
-      </p:cxnSp>
-      <p:cxnSp>
-        <p:nvCxnSpPr>
-          <p:cNvPr id="58" name="C4-E15 line 56" descr="sci-ppt:o056"/>
-          <p:cNvCxnSpPr/>
-          <p:nvPr/>
-        </p:nvCxnSpPr>
-        <p:spPr>
-          <a:xfrm>
-            <a:off x="5141214" y="1683400"/>
-            <a:ext cx="76581" cy="48937"/>
-          </a:xfrm>
-          <a:prstGeom prst="line">
-            <a:avLst/>
-          </a:prstGeom>
-          <a:ln w="25400">
-            <a:solidFill>
-              <a:srgbClr val="8EDBD4"/>
-            </a:solidFill>
-          </a:ln>
-          <a:effectLst/>
-        </p:spPr>
-      </p:cxnSp>
-      <p:cxnSp>
-        <p:nvCxnSpPr>
-          <p:cNvPr id="59" name="C4-E15 line 57" descr="sci-ppt:o057"/>
-          <p:cNvCxnSpPr/>
-          <p:nvPr/>
-        </p:nvCxnSpPr>
-        <p:spPr>
-          <a:xfrm>
-            <a:off x="5217795" y="1732337"/>
-            <a:ext cx="76580" cy="51181"/>
-          </a:xfrm>
-          <a:prstGeom prst="line">
-            <a:avLst/>
-          </a:prstGeom>
-          <a:ln w="25400">
-            <a:solidFill>
-              <a:srgbClr val="8EDBD4"/>
-            </a:solidFill>
-          </a:ln>
-          <a:effectLst/>
-        </p:spPr>
-      </p:cxnSp>
-      <p:cxnSp>
-        <p:nvCxnSpPr>
-          <p:cNvPr id="60" name="C4-E15 line 58" descr="sci-ppt:o058"/>
-          <p:cNvCxnSpPr/>
-          <p:nvPr/>
-        </p:nvCxnSpPr>
-        <p:spPr>
-          <a:xfrm>
-            <a:off x="5294375" y="1783518"/>
-            <a:ext cx="76582" cy="53202"/>
-          </a:xfrm>
-          <a:prstGeom prst="line">
-            <a:avLst/>
-          </a:prstGeom>
-          <a:ln w="25400">
-            <a:solidFill>
-              <a:srgbClr val="8EDBD4"/>
-            </a:solidFill>
-          </a:ln>
-          <a:effectLst/>
-        </p:spPr>
-      </p:cxnSp>
-      <p:cxnSp>
-        <p:nvCxnSpPr>
-          <p:cNvPr id="61" name="C4-E15 line 59" descr="sci-ppt:o059"/>
-          <p:cNvCxnSpPr/>
-          <p:nvPr/>
-        </p:nvCxnSpPr>
-        <p:spPr>
-          <a:xfrm>
-            <a:off x="5370957" y="1836720"/>
-            <a:ext cx="76581" cy="54981"/>
-          </a:xfrm>
-          <a:prstGeom prst="line">
-            <a:avLst/>
-          </a:prstGeom>
-          <a:ln w="25400">
-            <a:solidFill>
-              <a:srgbClr val="8EDBD4"/>
-            </a:solidFill>
-          </a:ln>
-          <a:effectLst/>
-        </p:spPr>
-      </p:cxnSp>
-      <p:cxnSp>
-        <p:nvCxnSpPr>
-          <p:cNvPr id="62" name="C4-E15 line 60" descr="sci-ppt:o060"/>
-          <p:cNvCxnSpPr/>
-          <p:nvPr/>
-        </p:nvCxnSpPr>
-        <p:spPr>
-          <a:xfrm>
-            <a:off x="5447538" y="1891701"/>
-            <a:ext cx="76581" cy="56504"/>
-          </a:xfrm>
-          <a:prstGeom prst="line">
-            <a:avLst/>
-          </a:prstGeom>
-          <a:ln w="25400">
-            <a:solidFill>
-              <a:srgbClr val="8EDBD4"/>
-            </a:solidFill>
-          </a:ln>
-          <a:effectLst/>
-        </p:spPr>
-      </p:cxnSp>
-      <p:cxnSp>
-        <p:nvCxnSpPr>
-          <p:cNvPr id="63" name="C4-E15 line 61" descr="sci-ppt:o061"/>
-          <p:cNvCxnSpPr/>
-          <p:nvPr/>
-        </p:nvCxnSpPr>
-        <p:spPr>
-          <a:xfrm>
-            <a:off x="5524119" y="1948205"/>
-            <a:ext cx="76581" cy="57760"/>
-          </a:xfrm>
-          <a:prstGeom prst="line">
-            <a:avLst/>
-          </a:prstGeom>
-          <a:ln w="25400">
-            <a:solidFill>
-              <a:srgbClr val="8EDBD4"/>
-            </a:solidFill>
-          </a:ln>
-          <a:effectLst/>
-        </p:spPr>
-      </p:cxnSp>
-      <p:cxnSp>
-        <p:nvCxnSpPr>
-          <p:cNvPr id="64" name="C4-E15 line 62" descr="sci-ppt:o062"/>
-          <p:cNvCxnSpPr/>
-          <p:nvPr/>
-        </p:nvCxnSpPr>
-        <p:spPr>
-          <a:xfrm>
-            <a:off x="5600700" y="2005965"/>
-            <a:ext cx="76581" cy="58729"/>
-          </a:xfrm>
-          <a:prstGeom prst="line">
-            <a:avLst/>
-          </a:prstGeom>
-          <a:ln w="25400">
-            <a:solidFill>
-              <a:srgbClr val="8EDBD4"/>
-            </a:solidFill>
-          </a:ln>
-          <a:effectLst/>
-        </p:spPr>
-      </p:cxnSp>
-      <p:cxnSp>
-        <p:nvCxnSpPr>
-          <p:cNvPr id="65" name="C4-E15 line 63" descr="sci-ppt:o063"/>
-          <p:cNvCxnSpPr/>
-          <p:nvPr/>
-        </p:nvCxnSpPr>
-        <p:spPr>
-          <a:xfrm>
-            <a:off x="5677281" y="2064694"/>
-            <a:ext cx="76581" cy="59401"/>
-          </a:xfrm>
-          <a:prstGeom prst="line">
-            <a:avLst/>
-          </a:prstGeom>
-          <a:ln w="25400">
-            <a:solidFill>
-              <a:srgbClr val="8EDBD4"/>
-            </a:solidFill>
-          </a:ln>
-          <a:effectLst/>
-        </p:spPr>
-      </p:cxnSp>
-      <p:cxnSp>
-        <p:nvCxnSpPr>
-          <p:cNvPr id="66" name="C4-E15 line 64" descr="sci-ppt:o064"/>
-          <p:cNvCxnSpPr/>
-          <p:nvPr/>
-        </p:nvCxnSpPr>
-        <p:spPr>
-          <a:xfrm>
-            <a:off x="5753862" y="2124095"/>
-            <a:ext cx="76581" cy="59760"/>
-          </a:xfrm>
-          <a:prstGeom prst="line">
-            <a:avLst/>
-          </a:prstGeom>
-          <a:ln w="25400">
-            <a:solidFill>
-              <a:srgbClr val="8EDBD4"/>
-            </a:solidFill>
-          </a:ln>
-          <a:effectLst/>
-        </p:spPr>
-      </p:cxnSp>
-      <p:cxnSp>
-        <p:nvCxnSpPr>
-          <p:cNvPr id="67" name="C4-E15 line 65" descr="sci-ppt:o065"/>
-          <p:cNvCxnSpPr/>
-          <p:nvPr/>
-        </p:nvCxnSpPr>
-        <p:spPr>
-          <a:xfrm>
-            <a:off x="5830443" y="2183855"/>
-            <a:ext cx="76581" cy="59789"/>
-          </a:xfrm>
-          <a:prstGeom prst="line">
-            <a:avLst/>
-          </a:prstGeom>
-          <a:ln w="25400">
-            <a:solidFill>
-              <a:srgbClr val="8EDBD4"/>
-            </a:solidFill>
-          </a:ln>
-          <a:effectLst/>
-        </p:spPr>
-      </p:cxnSp>
-      <p:cxnSp>
-        <p:nvCxnSpPr>
-          <p:cNvPr id="68" name="C4-E15 line 66" descr="sci-ppt:o066"/>
-          <p:cNvCxnSpPr/>
-          <p:nvPr/>
-        </p:nvCxnSpPr>
-        <p:spPr>
-          <a:xfrm>
-            <a:off x="5907024" y="2243644"/>
-            <a:ext cx="76580" cy="59478"/>
-          </a:xfrm>
-          <a:prstGeom prst="line">
-            <a:avLst/>
-          </a:prstGeom>
-          <a:ln w="25400">
-            <a:solidFill>
-              <a:srgbClr val="8EDBD4"/>
-            </a:solidFill>
-          </a:ln>
-          <a:effectLst/>
-        </p:spPr>
-      </p:cxnSp>
-      <p:cxnSp>
-        <p:nvCxnSpPr>
-          <p:cNvPr id="69" name="C4-E15 line 67" descr="sci-ppt:o067"/>
-          <p:cNvCxnSpPr/>
-          <p:nvPr/>
-        </p:nvCxnSpPr>
-        <p:spPr>
-          <a:xfrm>
-            <a:off x="5983604" y="2303122"/>
-            <a:ext cx="76582" cy="58809"/>
-          </a:xfrm>
-          <a:prstGeom prst="line">
-            <a:avLst/>
-          </a:prstGeom>
-          <a:ln w="25400">
-            <a:solidFill>
-              <a:srgbClr val="8EDBD4"/>
-            </a:solidFill>
-          </a:ln>
-          <a:effectLst/>
-        </p:spPr>
-      </p:cxnSp>
-      <p:cxnSp>
-        <p:nvCxnSpPr>
-          <p:cNvPr id="70" name="C4-E15 line 68" descr="sci-ppt:o068"/>
-          <p:cNvCxnSpPr/>
-          <p:nvPr/>
-        </p:nvCxnSpPr>
-        <p:spPr>
-          <a:xfrm>
-            <a:off x="6060186" y="2361931"/>
-            <a:ext cx="76581" cy="57767"/>
-          </a:xfrm>
-          <a:prstGeom prst="line">
-            <a:avLst/>
-          </a:prstGeom>
-          <a:ln w="25400">
-            <a:solidFill>
-              <a:srgbClr val="8EDBD4"/>
-            </a:solidFill>
-          </a:ln>
-          <a:effectLst/>
-        </p:spPr>
-      </p:cxnSp>
-      <p:cxnSp>
-        <p:nvCxnSpPr>
-          <p:cNvPr id="71" name="C4-E15 line 69" descr="sci-ppt:o069"/>
-          <p:cNvCxnSpPr/>
-          <p:nvPr/>
-        </p:nvCxnSpPr>
-        <p:spPr>
-          <a:xfrm>
-            <a:off x="6136767" y="2419698"/>
-            <a:ext cx="76581" cy="56341"/>
-          </a:xfrm>
-          <a:prstGeom prst="line">
-            <a:avLst/>
-          </a:prstGeom>
-          <a:ln w="25400">
-            <a:solidFill>
-              <a:srgbClr val="8EDBD4"/>
-            </a:solidFill>
-          </a:ln>
-          <a:effectLst/>
-        </p:spPr>
-      </p:cxnSp>
-      <p:cxnSp>
-        <p:nvCxnSpPr>
-          <p:cNvPr id="72" name="C4-E15 line 70" descr="sci-ppt:o070"/>
-          <p:cNvCxnSpPr/>
-          <p:nvPr/>
-        </p:nvCxnSpPr>
-        <p:spPr>
-          <a:xfrm>
-            <a:off x="6213348" y="2476039"/>
-            <a:ext cx="76581" cy="54513"/>
-          </a:xfrm>
-          <a:prstGeom prst="line">
-            <a:avLst/>
-          </a:prstGeom>
-          <a:ln w="25400">
-            <a:solidFill>
-              <a:srgbClr val="8EDBD4"/>
-            </a:solidFill>
-          </a:ln>
-          <a:effectLst/>
-        </p:spPr>
-      </p:cxnSp>
-      <p:cxnSp>
-        <p:nvCxnSpPr>
-          <p:cNvPr id="73" name="C4-E15 line 71" descr="sci-ppt:o071"/>
-          <p:cNvCxnSpPr/>
-          <p:nvPr/>
-        </p:nvCxnSpPr>
-        <p:spPr>
-          <a:xfrm>
-            <a:off x="6289929" y="2530552"/>
-            <a:ext cx="76581" cy="52270"/>
-          </a:xfrm>
-          <a:prstGeom prst="line">
-            <a:avLst/>
-          </a:prstGeom>
-          <a:ln w="25400">
-            <a:solidFill>
-              <a:srgbClr val="8EDBD4"/>
-            </a:solidFill>
-          </a:ln>
-          <a:effectLst/>
-        </p:spPr>
-      </p:cxnSp>
-      <p:cxnSp>
-        <p:nvCxnSpPr>
-          <p:cNvPr id="74" name="C4-E15 line 72" descr="sci-ppt:o072"/>
-          <p:cNvCxnSpPr/>
-          <p:nvPr/>
-        </p:nvCxnSpPr>
-        <p:spPr>
-          <a:xfrm>
-            <a:off x="6366510" y="2582822"/>
-            <a:ext cx="76581" cy="49597"/>
-          </a:xfrm>
-          <a:prstGeom prst="line">
-            <a:avLst/>
-          </a:prstGeom>
-          <a:ln w="25400">
-            <a:solidFill>
-              <a:srgbClr val="8EDBD4"/>
-            </a:solidFill>
-          </a:ln>
-          <a:effectLst/>
-        </p:spPr>
-      </p:cxnSp>
-      <p:cxnSp>
-        <p:nvCxnSpPr>
-          <p:cNvPr id="75" name="C4-E15 line 73" descr="sci-ppt:o073"/>
-          <p:cNvCxnSpPr/>
-          <p:nvPr/>
-        </p:nvCxnSpPr>
-        <p:spPr>
-          <a:xfrm>
-            <a:off x="6443091" y="2632419"/>
-            <a:ext cx="76581" cy="46480"/>
-          </a:xfrm>
-          <a:prstGeom prst="line">
-            <a:avLst/>
-          </a:prstGeom>
-          <a:ln w="25400">
-            <a:solidFill>
-              <a:srgbClr val="8EDBD4"/>
-            </a:solidFill>
-          </a:ln>
-          <a:effectLst/>
-        </p:spPr>
-      </p:cxnSp>
-      <p:cxnSp>
-        <p:nvCxnSpPr>
-          <p:cNvPr id="76" name="C4-E15 line 74" descr="sci-ppt:o074"/>
-          <p:cNvCxnSpPr/>
-          <p:nvPr/>
-        </p:nvCxnSpPr>
-        <p:spPr>
-          <a:xfrm>
-            <a:off x="6519672" y="2678899"/>
-            <a:ext cx="76581" cy="42903"/>
-          </a:xfrm>
-          <a:prstGeom prst="line">
-            <a:avLst/>
-          </a:prstGeom>
-          <a:ln w="25400">
-            <a:solidFill>
-              <a:srgbClr val="8EDBD4"/>
-            </a:solidFill>
-          </a:ln>
-          <a:effectLst/>
-        </p:spPr>
-      </p:cxnSp>
-      <p:cxnSp>
-        <p:nvCxnSpPr>
-          <p:cNvPr id="77" name="C4-E15 line 75" descr="sci-ppt:o075"/>
-          <p:cNvCxnSpPr/>
-          <p:nvPr/>
-        </p:nvCxnSpPr>
-        <p:spPr>
-          <a:xfrm>
-            <a:off x="6596253" y="2721802"/>
-            <a:ext cx="76580" cy="38853"/>
-          </a:xfrm>
-          <a:prstGeom prst="line">
-            <a:avLst/>
-          </a:prstGeom>
-          <a:ln w="25400">
-            <a:solidFill>
-              <a:srgbClr val="8EDBD4"/>
-            </a:solidFill>
-          </a:ln>
-          <a:effectLst/>
-        </p:spPr>
-      </p:cxnSp>
-      <p:cxnSp>
-        <p:nvCxnSpPr>
-          <p:cNvPr id="78" name="C4-E15 line 76" descr="sci-ppt:o076"/>
-          <p:cNvCxnSpPr/>
-          <p:nvPr/>
-        </p:nvCxnSpPr>
-        <p:spPr>
-          <a:xfrm>
-            <a:off x="6672833" y="2760655"/>
-            <a:ext cx="76582" cy="34314"/>
-          </a:xfrm>
-          <a:prstGeom prst="line">
-            <a:avLst/>
-          </a:prstGeom>
-          <a:ln w="25400">
-            <a:solidFill>
-              <a:srgbClr val="8EDBD4"/>
-            </a:solidFill>
-          </a:ln>
-          <a:effectLst/>
-        </p:spPr>
-      </p:cxnSp>
-      <p:cxnSp>
-        <p:nvCxnSpPr>
-          <p:cNvPr id="79" name="C4-E15 line 77" descr="sci-ppt:o077"/>
-          <p:cNvCxnSpPr/>
-          <p:nvPr/>
-        </p:nvCxnSpPr>
-        <p:spPr>
-          <a:xfrm>
-            <a:off x="6749415" y="2794969"/>
-            <a:ext cx="76581" cy="29274"/>
-          </a:xfrm>
-          <a:prstGeom prst="line">
-            <a:avLst/>
-          </a:prstGeom>
-          <a:ln w="25400">
-            <a:solidFill>
-              <a:srgbClr val="8EDBD4"/>
-            </a:solidFill>
-          </a:ln>
-          <a:effectLst/>
-        </p:spPr>
-      </p:cxnSp>
-      <p:cxnSp>
-        <p:nvCxnSpPr>
-          <p:cNvPr id="80" name="C4-E15 line 78" descr="sci-ppt:o078"/>
-          <p:cNvCxnSpPr/>
-          <p:nvPr/>
-        </p:nvCxnSpPr>
-        <p:spPr>
-          <a:xfrm>
-            <a:off x="6825996" y="2824243"/>
-            <a:ext cx="76581" cy="23715"/>
-          </a:xfrm>
-          <a:prstGeom prst="line">
-            <a:avLst/>
-          </a:prstGeom>
-          <a:ln w="25400">
-            <a:solidFill>
-              <a:srgbClr val="8EDBD4"/>
-            </a:solidFill>
-          </a:ln>
-          <a:effectLst/>
-        </p:spPr>
-      </p:cxnSp>
-      <p:cxnSp>
-        <p:nvCxnSpPr>
-          <p:cNvPr id="81" name="C4-E15 line 79" descr="sci-ppt:o079"/>
-          <p:cNvCxnSpPr/>
-          <p:nvPr/>
-        </p:nvCxnSpPr>
-        <p:spPr>
-          <a:xfrm>
-            <a:off x="6902577" y="2847958"/>
-            <a:ext cx="76581" cy="17624"/>
-          </a:xfrm>
-          <a:prstGeom prst="line">
-            <a:avLst/>
-          </a:prstGeom>
-          <a:ln w="25400">
-            <a:solidFill>
-              <a:srgbClr val="8EDBD4"/>
-            </a:solidFill>
-          </a:ln>
-          <a:effectLst/>
-        </p:spPr>
-      </p:cxnSp>
-      <p:cxnSp>
-        <p:nvCxnSpPr>
-          <p:cNvPr id="82" name="C4-E15 line 80" descr="sci-ppt:o080"/>
-          <p:cNvCxnSpPr/>
-          <p:nvPr/>
-        </p:nvCxnSpPr>
-        <p:spPr>
-          <a:xfrm>
-            <a:off x="6979158" y="2865582"/>
-            <a:ext cx="76581" cy="10988"/>
-          </a:xfrm>
-          <a:prstGeom prst="line">
-            <a:avLst/>
-          </a:prstGeom>
-          <a:ln w="25400">
-            <a:solidFill>
-              <a:srgbClr val="8EDBD4"/>
-            </a:solidFill>
-          </a:ln>
-          <a:effectLst/>
-        </p:spPr>
-      </p:cxnSp>
-      <p:cxnSp>
-        <p:nvCxnSpPr>
-          <p:cNvPr id="83" name="C4-E15 line 81" descr="sci-ppt:o081"/>
-          <p:cNvCxnSpPr/>
-          <p:nvPr/>
-        </p:nvCxnSpPr>
-        <p:spPr>
-          <a:xfrm>
-            <a:off x="7055739" y="2876570"/>
-            <a:ext cx="76581" cy="3790"/>
-          </a:xfrm>
-          <a:prstGeom prst="line">
-            <a:avLst/>
-          </a:prstGeom>
-          <a:ln w="25400">
-            <a:solidFill>
-              <a:srgbClr val="8EDBD4"/>
-            </a:solidFill>
-          </a:ln>
-          <a:effectLst/>
-        </p:spPr>
-      </p:cxnSp>
-      <p:sp>
-        <p:nvSpPr>
-          <p:cNvPr id="84" name="C4-E15 rect 82" descr="sci-ppt:o082"/>
-          <p:cNvSpPr/>
-          <p:nvPr/>
-        </p:nvSpPr>
-        <p:spPr>
-          <a:xfrm>
-            <a:off x="777240" y="2651760"/>
-            <a:ext cx="274320" cy="457200"/>
-          </a:xfrm>
-          <a:prstGeom prst="rect">
-            <a:avLst/>
-          </a:prstGeom>
-          <a:solidFill>
-            <a:srgbClr val="213E4B"/>
-          </a:solidFill>
-          <a:ln w="19050">
-            <a:solidFill>
-              <a:srgbClr val="B4C7D2"/>
-            </a:solidFill>
-          </a:ln>
-          <a:effectLst/>
-        </p:spPr>
         <p:txBody>
           <a:bodyPr rtlCol="0" anchor="ctr"/>
           <a:lstStyle/>
@@ -4952,70 +5563,14 @@
       </p:sp>
       <p:sp>
         <p:nvSpPr>
-          <p:cNvPr id="85" name="C4-E15 rect 83" descr="sci-ppt:o083"/>
-          <p:cNvSpPr/>
-          <p:nvPr/>
-        </p:nvSpPr>
-        <p:spPr>
-          <a:xfrm>
-            <a:off x="7086600" y="2651760"/>
-            <a:ext cx="274320" cy="457200"/>
-          </a:xfrm>
-          <a:prstGeom prst="rect">
-            <a:avLst/>
-          </a:prstGeom>
-          <a:solidFill>
-            <a:srgbClr val="213E4B"/>
-          </a:solidFill>
-          <a:ln w="19050">
-            <a:solidFill>
-              <a:srgbClr val="B4C7D2"/>
-            </a:solidFill>
-          </a:ln>
-          <a:effectLst/>
-        </p:spPr>
-        <p:txBody>
-          <a:bodyPr rtlCol="0" anchor="ctr"/>
-          <a:lstStyle/>
-          <a:p>
-            <a:pPr algn="ctr"/>
-          </a:p>
-        </p:txBody>
-      </p:sp>
-      <p:cxnSp>
-        <p:nvCxnSpPr>
-          <p:cNvPr id="86" name="C4-E15 arrow 84" descr="sci-ppt:o084"/>
-          <p:cNvCxnSpPr/>
-          <p:nvPr/>
-        </p:nvCxnSpPr>
-        <p:spPr>
-          <a:xfrm flipV="1">
-            <a:off x="4069080" y="1371600"/>
-            <a:ext cx="0" cy="1463040"/>
-          </a:xfrm>
-          <a:prstGeom prst="line">
-            <a:avLst/>
-          </a:prstGeom>
-          <a:ln w="25400">
-            <a:solidFill>
-              <a:srgbClr val="8EDBD4"/>
-            </a:solidFill>
-            <a:headEnd type="none" w="med" len="med"/>
-            <a:tailEnd type="triangle" w="med" len="med"/>
-          </a:ln>
-          <a:effectLst/>
-        </p:spPr>
-      </p:cxnSp>
-      <p:sp>
-        <p:nvSpPr>
-          <p:cNvPr id="87" name="C4-E15 text 85" descr="sci-ppt:o085"/>
+          <p:cNvPr id="41" name="C4-E15 text 39" descr="sci-ppt:o039"/>
           <p:cNvSpPr txBox="1"/>
           <p:nvPr/>
         </p:nvSpPr>
         <p:spPr>
           <a:xfrm>
-            <a:off x="4206240" y="1920240"/>
-            <a:ext cx="2560320" cy="411480"/>
+            <a:off x="10314432" y="3085513"/>
+            <a:ext cx="1463040" cy="216153"/>
           </a:xfrm>
           <a:prstGeom prst="rect">
             <a:avLst/>
@@ -5024,7 +5579,7 @@
           <a:effectLst/>
         </p:spPr>
         <p:txBody>
-          <a:bodyPr wrap="square" lIns="27432" rIns="27432" tIns="18288" bIns="18288" anchor="ctr">
+          <a:bodyPr wrap="none" lIns="18288" rIns="18288" tIns="18288" bIns="18288" anchor="t">
             <a:spAutoFit/>
           </a:bodyPr>
           <a:lstStyle/>
@@ -5035,99 +5590,27 @@
               </a:spcAft>
             </a:pPr>
             <a:r>
-              <a:rPr sz="1800" b="0" i="0">
+              <a:rPr sz="1100" b="0" i="0">
                 <a:solidFill>
                   <a:srgbClr val="E7F0F3"/>
                 </a:solidFill>
                 <a:latin typeface="Arial"/>
               </a:rPr>
-              <a:t>w(r) ↑</a:t>
-            </a:r>
-          </a:p>
-        </p:txBody>
-      </p:sp>
-      <p:cxnSp>
-        <p:nvCxnSpPr>
-          <p:cNvPr id="88" name="C4-E15 arrow 86" descr="sci-ppt:o086"/>
-          <p:cNvCxnSpPr/>
-          <p:nvPr/>
-        </p:nvCxnSpPr>
-        <p:spPr>
-          <a:xfrm flipV="1">
-            <a:off x="2286000" y="2971800"/>
-            <a:ext cx="0" cy="594360"/>
-          </a:xfrm>
-          <a:prstGeom prst="line">
-            <a:avLst/>
-          </a:prstGeom>
-          <a:ln w="25400">
-            <a:solidFill>
-              <a:srgbClr val="8EDBD4"/>
-            </a:solidFill>
-            <a:headEnd type="none" w="med" len="med"/>
-            <a:tailEnd type="triangle" w="med" len="med"/>
-          </a:ln>
-          <a:effectLst/>
-        </p:spPr>
-      </p:cxnSp>
-      <p:cxnSp>
-        <p:nvCxnSpPr>
-          <p:cNvPr id="89" name="C4-E15 arrow 87" descr="sci-ppt:o087"/>
-          <p:cNvCxnSpPr/>
-          <p:nvPr/>
-        </p:nvCxnSpPr>
-        <p:spPr>
-          <a:xfrm flipV="1">
-            <a:off x="4069080" y="2971800"/>
-            <a:ext cx="0" cy="594360"/>
-          </a:xfrm>
-          <a:prstGeom prst="line">
-            <a:avLst/>
-          </a:prstGeom>
-          <a:ln w="25400">
-            <a:solidFill>
-              <a:srgbClr val="8EDBD4"/>
-            </a:solidFill>
-            <a:headEnd type="none" w="med" len="med"/>
-            <a:tailEnd type="triangle" w="med" len="med"/>
-          </a:ln>
-          <a:effectLst/>
-        </p:spPr>
-      </p:cxnSp>
-      <p:cxnSp>
-        <p:nvCxnSpPr>
-          <p:cNvPr id="90" name="C4-E15 arrow 88" descr="sci-ppt:o088"/>
-          <p:cNvCxnSpPr/>
-          <p:nvPr/>
-        </p:nvCxnSpPr>
-        <p:spPr>
-          <a:xfrm flipV="1">
-            <a:off x="5852160" y="2971800"/>
-            <a:ext cx="0" cy="594360"/>
-          </a:xfrm>
-          <a:prstGeom prst="line">
-            <a:avLst/>
-          </a:prstGeom>
-          <a:ln w="25400">
-            <a:solidFill>
-              <a:srgbClr val="8EDBD4"/>
-            </a:solidFill>
-            <a:headEnd type="none" w="med" len="med"/>
-            <a:tailEnd type="triangle" w="med" len="med"/>
-          </a:ln>
-          <a:effectLst/>
-        </p:spPr>
-      </p:cxnSp>
-      <p:sp>
-        <p:nvSpPr>
-          <p:cNvPr id="91" name="C4-E15 text 89" descr="sci-ppt:o089"/>
+              <a:t>sum (dashed)</a:t>
+            </a:r>
+          </a:p>
+        </p:txBody>
+      </p:sp>
+      <p:sp>
+        <p:nvSpPr>
+          <p:cNvPr id="42" name="C4-E15 text 40" descr="sci-ppt:o040"/>
           <p:cNvSpPr txBox="1"/>
           <p:nvPr/>
         </p:nvSpPr>
         <p:spPr>
           <a:xfrm>
-            <a:off x="2834640" y="3611880"/>
-            <a:ext cx="3657600" cy="274320"/>
+            <a:off x="10460736" y="3990535"/>
+            <a:ext cx="1097280" cy="216153"/>
           </a:xfrm>
           <a:prstGeom prst="rect">
             <a:avLst/>
@@ -5136,7 +5619,7 @@
           <a:effectLst/>
         </p:spPr>
         <p:txBody>
-          <a:bodyPr wrap="square" lIns="27432" rIns="27432" tIns="18288" bIns="18288" anchor="ctr">
+          <a:bodyPr wrap="none" lIns="18288" rIns="18288" tIns="18288" bIns="18288" anchor="t">
             <a:spAutoFit/>
           </a:bodyPr>
           <a:lstStyle/>
@@ -5147,49 +5630,163 @@
               </a:spcAft>
             </a:pPr>
             <a:r>
-              <a:rPr sz="1600" b="0" i="0">
+              <a:rPr sz="1100" b="0" i="0">
+                <a:solidFill>
+                  <a:srgbClr val="F2B880"/>
+                </a:solidFill>
+                <a:latin typeface="Arial"/>
+              </a:rPr>
+              <a:t>r² term</a:t>
+            </a:r>
+          </a:p>
+        </p:txBody>
+      </p:sp>
+      <p:sp>
+        <p:nvSpPr>
+          <p:cNvPr id="43" name="C4-E15 text 41" descr="sci-ppt:o041"/>
+          <p:cNvSpPr txBox="1"/>
+          <p:nvPr/>
+        </p:nvSpPr>
+        <p:spPr>
+          <a:xfrm>
+            <a:off x="10168128" y="1570892"/>
+            <a:ext cx="1371600" cy="216153"/>
+          </a:xfrm>
+          <a:prstGeom prst="rect">
+            <a:avLst/>
+          </a:prstGeom>
+          <a:noFill/>
+          <a:effectLst/>
+        </p:spPr>
+        <p:txBody>
+          <a:bodyPr wrap="none" lIns="18288" rIns="18288" tIns="18288" bIns="18288" anchor="t">
+            <a:spAutoFit/>
+          </a:bodyPr>
+          <a:lstStyle/>
+          <a:p>
+            <a:pPr algn="l">
+              <a:spcAft>
+                <a:spcPts val="0"/>
+              </a:spcAft>
+            </a:pPr>
+            <a:r>
+              <a:rPr sz="1100" b="0" i="0">
+                <a:solidFill>
+                  <a:srgbClr val="F28BA0"/>
+                </a:solidFill>
+                <a:latin typeface="Arial"/>
+              </a:rPr>
+              <a:t>constant C₄</a:t>
+            </a:r>
+          </a:p>
+        </p:txBody>
+      </p:sp>
+      <p:sp>
+        <p:nvSpPr>
+          <p:cNvPr id="44" name="C4-E15 text 42" descr="sci-ppt:o042"/>
+          <p:cNvSpPr txBox="1"/>
+          <p:nvPr/>
+        </p:nvSpPr>
+        <p:spPr>
+          <a:xfrm>
+            <a:off x="9729215" y="2447778"/>
+            <a:ext cx="1097280" cy="216153"/>
+          </a:xfrm>
+          <a:prstGeom prst="rect">
+            <a:avLst/>
+          </a:prstGeom>
+          <a:noFill/>
+          <a:effectLst/>
+        </p:spPr>
+        <p:txBody>
+          <a:bodyPr wrap="none" lIns="18288" rIns="18288" tIns="18288" bIns="18288" anchor="t">
+            <a:spAutoFit/>
+          </a:bodyPr>
+          <a:lstStyle/>
+          <a:p>
+            <a:pPr algn="l">
+              <a:spcAft>
+                <a:spcPts val="0"/>
+              </a:spcAft>
+            </a:pPr>
+            <a:r>
+              <a:rPr sz="1100" b="0" i="0">
+                <a:solidFill>
+                  <a:srgbClr val="8EDBD4"/>
+                </a:solidFill>
+                <a:latin typeface="Arial"/>
+              </a:rPr>
+              <a:t>r⁴ term</a:t>
+            </a:r>
+          </a:p>
+        </p:txBody>
+      </p:sp>
+      <p:sp>
+        <p:nvSpPr>
+          <p:cNvPr id="45" name="C4-E15 text 43" descr="sci-ppt:o043"/>
+          <p:cNvSpPr txBox="1"/>
+          <p:nvPr/>
+        </p:nvSpPr>
+        <p:spPr>
+          <a:xfrm>
+            <a:off x="548640" y="4297680"/>
+            <a:ext cx="7863840" cy="433070"/>
+          </a:xfrm>
+          <a:prstGeom prst="rect">
+            <a:avLst/>
+          </a:prstGeom>
+          <a:noFill/>
+          <a:effectLst/>
+        </p:spPr>
+        <p:txBody>
+          <a:bodyPr wrap="none" lIns="18288" rIns="18288" tIns="18288" bIns="18288" anchor="t">
+            <a:spAutoFit/>
+          </a:bodyPr>
+          <a:lstStyle/>
+          <a:p>
+            <a:pPr algn="l">
+              <a:spcAft>
+                <a:spcPts val="0"/>
+              </a:spcAft>
+            </a:pPr>
+            <a:r>
+              <a:rPr sz="1250" b="0" i="0">
                 <a:solidFill>
                   <a:srgbClr val="E7F0F3"/>
                 </a:solidFill>
                 <a:latin typeface="Arial"/>
               </a:rPr>
-              <a:t>p₀: maintained pressure</a:t>
-            </a:r>
-          </a:p>
-        </p:txBody>
-      </p:sp>
-      <p:cxnSp>
-        <p:nvCxnSpPr>
-          <p:cNvPr id="92" name="C4-E15 line 90" descr="sci-ppt:o090"/>
-          <p:cNvCxnSpPr/>
-          <p:nvPr/>
-        </p:nvCxnSpPr>
-        <p:spPr>
-          <a:xfrm>
-            <a:off x="4069080" y="3200400"/>
-            <a:ext cx="3063240" cy="0"/>
-          </a:xfrm>
-          <a:prstGeom prst="line">
-            <a:avLst/>
-          </a:prstGeom>
-          <a:ln w="25400">
-            <a:solidFill>
-              <a:srgbClr val="8EDBD4"/>
-            </a:solidFill>
-          </a:ln>
-          <a:effectLst/>
-        </p:spPr>
-      </p:cxnSp>
-      <p:sp>
-        <p:nvSpPr>
-          <p:cNvPr id="93" name="C4-E15 text 91" descr="sci-ppt:o091"/>
+              <a:t>The regular solution has three pieces: quartic (from the load), quadratic and constant (both</a:t>
+            </a:r>
+          </a:p>
+          <a:p>
+            <a:pPr algn="l">
+              <a:spcAft>
+                <a:spcPts val="0"/>
+              </a:spcAft>
+            </a:pPr>
+            <a:r>
+              <a:rPr sz="1250" b="0" i="0">
+                <a:solidFill>
+                  <a:srgbClr val="E7F0F3"/>
+                </a:solidFill>
+                <a:latin typeface="Arial"/>
+              </a:rPr>
+              <a:t>fixed by the clamp).</a:t>
+            </a:r>
+          </a:p>
+        </p:txBody>
+      </p:sp>
+      <p:sp>
+        <p:nvSpPr>
+          <p:cNvPr id="46" name="C4-E15 text 44" descr="sci-ppt:o044"/>
           <p:cNvSpPr txBox="1"/>
           <p:nvPr/>
         </p:nvSpPr>
         <p:spPr>
           <a:xfrm>
-            <a:off x="5486400" y="3246120"/>
-            <a:ext cx="914400" cy="274320"/>
+            <a:off x="548640" y="4892040"/>
+            <a:ext cx="10972800" cy="231648"/>
           </a:xfrm>
           <a:prstGeom prst="rect">
             <a:avLst/>
@@ -5198,7 +5795,7 @@
           <a:effectLst/>
         </p:spPr>
         <p:txBody>
-          <a:bodyPr wrap="square" lIns="27432" rIns="27432" tIns="18288" bIns="18288" anchor="ctr">
+          <a:bodyPr wrap="none" lIns="18288" rIns="18288" tIns="18288" bIns="18288" anchor="t">
             <a:spAutoFit/>
           </a:bodyPr>
           <a:lstStyle/>
@@ -5209,81 +5806,27 @@
               </a:spcAft>
             </a:pPr>
             <a:r>
-              <a:rPr sz="1600" b="0" i="0">
+              <a:rPr sz="1200" b="0" i="0">
                 <a:solidFill>
-                  <a:srgbClr val="E7F0F3"/>
+                  <a:srgbClr val="B4C7D2"/>
                 </a:solidFill>
                 <a:latin typeface="Arial"/>
               </a:rPr>
-              <a:t>b</a:t>
-            </a:r>
-          </a:p>
-        </p:txBody>
-      </p:sp>
-      <p:sp>
-        <p:nvSpPr>
-          <p:cNvPr id="94" name="C4-E15 ellipse 92" descr="sci-ppt:o092"/>
-          <p:cNvSpPr/>
-          <p:nvPr/>
-        </p:nvSpPr>
-        <p:spPr>
-          <a:xfrm>
-            <a:off x="8686800" y="1097280"/>
-            <a:ext cx="1920240" cy="1920240"/>
-          </a:xfrm>
-          <a:prstGeom prst="ellipse">
-            <a:avLst/>
-          </a:prstGeom>
-          <a:noFill/>
-          <a:ln w="19050">
-            <a:solidFill>
-              <a:srgbClr val="B4C7D2"/>
-            </a:solidFill>
-          </a:ln>
-          <a:effectLst/>
-        </p:spPr>
-        <p:txBody>
-          <a:bodyPr rtlCol="0" anchor="ctr"/>
-          <a:lstStyle/>
-          <a:p>
-            <a:pPr algn="ctr"/>
-          </a:p>
-        </p:txBody>
-      </p:sp>
-      <p:cxnSp>
-        <p:nvCxnSpPr>
-          <p:cNvPr id="95" name="C4-E15 arrow 93" descr="sci-ppt:o093"/>
-          <p:cNvCxnSpPr/>
-          <p:nvPr/>
-        </p:nvCxnSpPr>
-        <p:spPr>
-          <a:xfrm>
-            <a:off x="9646920" y="2057400"/>
-            <a:ext cx="960120" cy="0"/>
-          </a:xfrm>
-          <a:prstGeom prst="line">
-            <a:avLst/>
-          </a:prstGeom>
-          <a:ln w="25400">
-            <a:solidFill>
-              <a:srgbClr val="8EDBD4"/>
-            </a:solidFill>
-            <a:headEnd type="none" w="med" len="med"/>
-            <a:tailEnd type="triangle" w="med" len="med"/>
-          </a:ln>
-          <a:effectLst/>
-        </p:spPr>
-      </p:cxnSp>
-      <p:sp>
-        <p:nvSpPr>
-          <p:cNvPr id="96" name="C4-E15 text 94" descr="sci-ppt:o094"/>
+              <a:t>Right: the three terms (solid) add up to the final profile (dashed), using the constants found in Eq. C4-E16.</a:t>
+            </a:r>
+          </a:p>
+        </p:txBody>
+      </p:sp>
+      <p:sp>
+        <p:nvSpPr>
+          <p:cNvPr id="47" name="C4-E15 text 45" descr="sci-ppt:o045"/>
           <p:cNvSpPr txBox="1"/>
           <p:nvPr/>
         </p:nvSpPr>
         <p:spPr>
           <a:xfrm>
-            <a:off x="9875520" y="1645920"/>
-            <a:ext cx="914400" cy="274320"/>
+            <a:off x="320040" y="6510528"/>
+            <a:ext cx="11521440" cy="200660"/>
           </a:xfrm>
           <a:prstGeom prst="rect">
             <a:avLst/>
@@ -5292,469 +5835,7 @@
           <a:effectLst/>
         </p:spPr>
         <p:txBody>
-          <a:bodyPr wrap="square" lIns="27432" rIns="27432" tIns="18288" bIns="18288" anchor="ctr">
-            <a:spAutoFit/>
-          </a:bodyPr>
-          <a:lstStyle/>
-          <a:p>
-            <a:pPr algn="l">
-              <a:spcAft>
-                <a:spcPts val="0"/>
-              </a:spcAft>
-            </a:pPr>
-            <a:r>
-              <a:rPr sz="1700" b="0" i="0">
-                <a:solidFill>
-                  <a:srgbClr val="E7F0F3"/>
-                </a:solidFill>
-                <a:latin typeface="Arial"/>
-              </a:rPr>
-              <a:t>b</a:t>
-            </a:r>
-          </a:p>
-        </p:txBody>
-      </p:sp>
-      <p:sp>
-        <p:nvSpPr>
-          <p:cNvPr id="97" name="C4-E15 text 95" descr="sci-ppt:o095"/>
-          <p:cNvSpPr txBox="1"/>
-          <p:nvPr/>
-        </p:nvSpPr>
-        <p:spPr>
-          <a:xfrm>
-            <a:off x="8503920" y="3291840"/>
-            <a:ext cx="2743200" cy="365760"/>
-          </a:xfrm>
-          <a:prstGeom prst="rect">
-            <a:avLst/>
-          </a:prstGeom>
-          <a:noFill/>
-          <a:effectLst/>
-        </p:spPr>
-        <p:txBody>
-          <a:bodyPr wrap="square" lIns="27432" rIns="27432" tIns="18288" bIns="18288" anchor="ctr">
-            <a:spAutoFit/>
-          </a:bodyPr>
-          <a:lstStyle/>
-          <a:p>
-            <a:pPr algn="l">
-              <a:spcAft>
-                <a:spcPts val="0"/>
-              </a:spcAft>
-            </a:pPr>
-            <a:r>
-              <a:rPr sz="1800" b="0" i="0">
-                <a:solidFill>
-                  <a:srgbClr val="E7F0F3"/>
-                </a:solidFill>
-                <a:latin typeface="Arial"/>
-              </a:rPr>
-              <a:t>A_c = π b²</a:t>
-            </a:r>
-          </a:p>
-        </p:txBody>
-      </p:sp>
-      <p:sp>
-        <p:nvSpPr>
-          <p:cNvPr id="98" name="C4-E15 text 96" descr="sci-ppt:o096"/>
-          <p:cNvSpPr txBox="1"/>
-          <p:nvPr/>
-        </p:nvSpPr>
-        <p:spPr>
-          <a:xfrm>
-            <a:off x="685800" y="731520"/>
-            <a:ext cx="10972800" cy="365760"/>
-          </a:xfrm>
-          <a:prstGeom prst="rect">
-            <a:avLst/>
-          </a:prstGeom>
-          <a:noFill/>
-          <a:effectLst/>
-        </p:spPr>
-        <p:txBody>
-          <a:bodyPr wrap="square" lIns="27432" rIns="27432" tIns="18288" bIns="18288" anchor="ctr">
-            <a:spAutoFit/>
-          </a:bodyPr>
-          <a:lstStyle/>
-          <a:p>
-            <a:pPr algn="l">
-              <a:spcAft>
-                <a:spcPts val="0"/>
-              </a:spcAft>
-            </a:pPr>
-            <a:r>
-              <a:rPr sz="1800" b="0" i="0">
-                <a:solidFill>
-                  <a:srgbClr val="8EDBD4"/>
-                </a:solidFill>
-                <a:latin typeface="Arial"/>
-              </a:rPr>
-              <a:t>Clamped circular blister: w(b) = 0; w′(b) = 0; regular centre.</a:t>
-            </a:r>
-          </a:p>
-        </p:txBody>
-      </p:sp>
-      <p:cxnSp>
-        <p:nvCxnSpPr>
-          <p:cNvPr id="99" name="C4-E15 line 97" descr="sci-ppt:o097"/>
-          <p:cNvCxnSpPr/>
-          <p:nvPr/>
-        </p:nvCxnSpPr>
-        <p:spPr>
-          <a:xfrm>
-            <a:off x="274320" y="3977639"/>
-            <a:ext cx="11612880" cy="0"/>
-          </a:xfrm>
-          <a:prstGeom prst="line">
-            <a:avLst/>
-          </a:prstGeom>
-          <a:ln w="12700">
-            <a:solidFill>
-              <a:srgbClr val="405967"/>
-            </a:solidFill>
-          </a:ln>
-          <a:effectLst/>
-        </p:spPr>
-      </p:cxnSp>
-      <p:sp>
-        <p:nvSpPr>
-          <p:cNvPr id="100" name="C4-E15 text 98" descr="sci-ppt:o098"/>
-          <p:cNvSpPr txBox="1"/>
-          <p:nvPr/>
-        </p:nvSpPr>
-        <p:spPr>
-          <a:xfrm>
-            <a:off x="320040" y="4096512"/>
-            <a:ext cx="5715000" cy="246888"/>
-          </a:xfrm>
-          <a:prstGeom prst="rect">
-            <a:avLst/>
-          </a:prstGeom>
-          <a:noFill/>
-          <a:effectLst/>
-        </p:spPr>
-        <p:txBody>
-          <a:bodyPr wrap="square" lIns="27432" rIns="27432" tIns="18288" bIns="18288" anchor="ctr">
-            <a:spAutoFit/>
-          </a:bodyPr>
-          <a:lstStyle/>
-          <a:p>
-            <a:pPr algn="l">
-              <a:spcAft>
-                <a:spcPts val="0"/>
-              </a:spcAft>
-            </a:pPr>
-            <a:r>
-              <a:rPr sz="1150" b="0" i="0">
-                <a:solidFill>
-                  <a:srgbClr val="B4C7D2"/>
-                </a:solidFill>
-                <a:latin typeface="Arial"/>
-              </a:rPr>
-              <a:t>• r, b — radial geometry</a:t>
-            </a:r>
-          </a:p>
-        </p:txBody>
-      </p:sp>
-      <p:sp>
-        <p:nvSpPr>
-          <p:cNvPr id="101" name="C4-E15 text 99" descr="sci-ppt:o099"/>
-          <p:cNvSpPr txBox="1"/>
-          <p:nvPr/>
-        </p:nvSpPr>
-        <p:spPr>
-          <a:xfrm>
-            <a:off x="6217920" y="4096512"/>
-            <a:ext cx="5715000" cy="246888"/>
-          </a:xfrm>
-          <a:prstGeom prst="rect">
-            <a:avLst/>
-          </a:prstGeom>
-          <a:noFill/>
-          <a:effectLst/>
-        </p:spPr>
-        <p:txBody>
-          <a:bodyPr wrap="square" lIns="27432" rIns="27432" tIns="18288" bIns="18288" anchor="ctr">
-            <a:spAutoFit/>
-          </a:bodyPr>
-          <a:lstStyle/>
-          <a:p>
-            <a:pPr algn="l">
-              <a:spcAft>
-                <a:spcPts val="0"/>
-              </a:spcAft>
-            </a:pPr>
-            <a:r>
-              <a:rPr sz="1150" b="0" i="0">
-                <a:solidFill>
-                  <a:srgbClr val="B4C7D2"/>
-                </a:solidFill>
-                <a:latin typeface="Arial"/>
-              </a:rPr>
-              <a:t>• w(r), w′ — displacement and slope</a:t>
-            </a:r>
-          </a:p>
-        </p:txBody>
-      </p:sp>
-      <p:sp>
-        <p:nvSpPr>
-          <p:cNvPr id="102" name="C4-E15 text 100" descr="sci-ppt:o100"/>
-          <p:cNvSpPr txBox="1"/>
-          <p:nvPr/>
-        </p:nvSpPr>
-        <p:spPr>
-          <a:xfrm>
-            <a:off x="320040" y="4329684"/>
-            <a:ext cx="5715000" cy="246888"/>
-          </a:xfrm>
-          <a:prstGeom prst="rect">
-            <a:avLst/>
-          </a:prstGeom>
-          <a:noFill/>
-          <a:effectLst/>
-        </p:spPr>
-        <p:txBody>
-          <a:bodyPr wrap="square" lIns="27432" rIns="27432" tIns="18288" bIns="18288" anchor="ctr">
-            <a:spAutoFit/>
-          </a:bodyPr>
-          <a:lstStyle/>
-          <a:p>
-            <a:pPr algn="l">
-              <a:spcAft>
-                <a:spcPts val="0"/>
-              </a:spcAft>
-            </a:pPr>
-            <a:r>
-              <a:rPr sz="1150" b="0" i="0">
-                <a:solidFill>
-                  <a:srgbClr val="B4C7D2"/>
-                </a:solidFill>
-                <a:latin typeface="Arial"/>
-              </a:rPr>
-              <a:t>• g — curvature sum</a:t>
-            </a:r>
-          </a:p>
-        </p:txBody>
-      </p:sp>
-      <p:sp>
-        <p:nvSpPr>
-          <p:cNvPr id="103" name="C4-E15 text 101" descr="sci-ppt:o101"/>
-          <p:cNvSpPr txBox="1"/>
-          <p:nvPr/>
-        </p:nvSpPr>
-        <p:spPr>
-          <a:xfrm>
-            <a:off x="6217920" y="4329684"/>
-            <a:ext cx="5715000" cy="246888"/>
-          </a:xfrm>
-          <a:prstGeom prst="rect">
-            <a:avLst/>
-          </a:prstGeom>
-          <a:noFill/>
-          <a:effectLst/>
-        </p:spPr>
-        <p:txBody>
-          <a:bodyPr wrap="square" lIns="27432" rIns="27432" tIns="18288" bIns="18288" anchor="ctr">
-            <a:spAutoFit/>
-          </a:bodyPr>
-          <a:lstStyle/>
-          <a:p>
-            <a:pPr algn="l">
-              <a:spcAft>
-                <a:spcPts val="0"/>
-              </a:spcAft>
-            </a:pPr>
-            <a:r>
-              <a:rPr sz="1150" b="0" i="0">
-                <a:solidFill>
-                  <a:srgbClr val="B4C7D2"/>
-                </a:solidFill>
-                <a:latin typeface="Arial"/>
-              </a:rPr>
-              <a:t>• p₀, D_f — forcing and stiffness</a:t>
-            </a:r>
-          </a:p>
-        </p:txBody>
-      </p:sp>
-      <p:sp>
-        <p:nvSpPr>
-          <p:cNvPr id="104" name="C4-E15 text 102" descr="sci-ppt:o102"/>
-          <p:cNvSpPr txBox="1"/>
-          <p:nvPr/>
-        </p:nvSpPr>
-        <p:spPr>
-          <a:xfrm>
-            <a:off x="320040" y="4562856"/>
-            <a:ext cx="5715000" cy="246888"/>
-          </a:xfrm>
-          <a:prstGeom prst="rect">
-            <a:avLst/>
-          </a:prstGeom>
-          <a:noFill/>
-          <a:effectLst/>
-        </p:spPr>
-        <p:txBody>
-          <a:bodyPr wrap="square" lIns="27432" rIns="27432" tIns="18288" bIns="18288" anchor="ctr">
-            <a:spAutoFit/>
-          </a:bodyPr>
-          <a:lstStyle/>
-          <a:p>
-            <a:pPr algn="l">
-              <a:spcAft>
-                <a:spcPts val="0"/>
-              </a:spcAft>
-            </a:pPr>
-            <a:r>
-              <a:rPr sz="1150" b="0" i="0">
-                <a:solidFill>
-                  <a:srgbClr val="B4C7D2"/>
-                </a:solidFill>
-                <a:latin typeface="Arial"/>
-              </a:rPr>
-              <a:t>• C₂ — curvature offset</a:t>
-            </a:r>
-          </a:p>
-        </p:txBody>
-      </p:sp>
-      <p:sp>
-        <p:nvSpPr>
-          <p:cNvPr id="105" name="C4-E15 text 103" descr="sci-ppt:o103"/>
-          <p:cNvSpPr txBox="1"/>
-          <p:nvPr/>
-        </p:nvSpPr>
-        <p:spPr>
-          <a:xfrm>
-            <a:off x="6217920" y="4562856"/>
-            <a:ext cx="5715000" cy="246888"/>
-          </a:xfrm>
-          <a:prstGeom prst="rect">
-            <a:avLst/>
-          </a:prstGeom>
-          <a:noFill/>
-          <a:effectLst/>
-        </p:spPr>
-        <p:txBody>
-          <a:bodyPr wrap="square" lIns="27432" rIns="27432" tIns="18288" bIns="18288" anchor="ctr">
-            <a:spAutoFit/>
-          </a:bodyPr>
-          <a:lstStyle/>
-          <a:p>
-            <a:pPr algn="l">
-              <a:spcAft>
-                <a:spcPts val="0"/>
-              </a:spcAft>
-            </a:pPr>
-            <a:r>
-              <a:rPr sz="1150" b="0" i="0">
-                <a:solidFill>
-                  <a:srgbClr val="B4C7D2"/>
-                </a:solidFill>
-                <a:latin typeface="Arial"/>
-              </a:rPr>
-              <a:t>• C₃ = 0 — regular slope</a:t>
-            </a:r>
-          </a:p>
-        </p:txBody>
-      </p:sp>
-      <p:sp>
-        <p:nvSpPr>
-          <p:cNvPr id="106" name="C4-E15 text 104" descr="sci-ppt:o104"/>
-          <p:cNvSpPr txBox="1"/>
-          <p:nvPr/>
-        </p:nvSpPr>
-        <p:spPr>
-          <a:xfrm>
-            <a:off x="320040" y="4796028"/>
-            <a:ext cx="5715000" cy="246888"/>
-          </a:xfrm>
-          <a:prstGeom prst="rect">
-            <a:avLst/>
-          </a:prstGeom>
-          <a:noFill/>
-          <a:effectLst/>
-        </p:spPr>
-        <p:txBody>
-          <a:bodyPr wrap="square" lIns="27432" rIns="27432" tIns="18288" bIns="18288" anchor="ctr">
-            <a:spAutoFit/>
-          </a:bodyPr>
-          <a:lstStyle/>
-          <a:p>
-            <a:pPr algn="l">
-              <a:spcAft>
-                <a:spcPts val="0"/>
-              </a:spcAft>
-            </a:pPr>
-            <a:r>
-              <a:rPr sz="1150" b="0" i="0">
-                <a:solidFill>
-                  <a:srgbClr val="B4C7D2"/>
-                </a:solidFill>
-                <a:latin typeface="Arial"/>
-              </a:rPr>
-              <a:t>• C₄ — height offset</a:t>
-            </a:r>
-          </a:p>
-        </p:txBody>
-      </p:sp>
-      <p:sp>
-        <p:nvSpPr>
-          <p:cNvPr id="107" name="C4-E15 text 105" descr="sci-ppt:o105"/>
-          <p:cNvSpPr txBox="1"/>
-          <p:nvPr/>
-        </p:nvSpPr>
-        <p:spPr>
-          <a:xfrm>
-            <a:off x="320040" y="5596128"/>
-            <a:ext cx="11430000" cy="292608"/>
-          </a:xfrm>
-          <a:prstGeom prst="rect">
-            <a:avLst/>
-          </a:prstGeom>
-          <a:noFill/>
-          <a:effectLst/>
-        </p:spPr>
-        <p:txBody>
-          <a:bodyPr wrap="square" lIns="27432" rIns="27432" tIns="18288" bIns="18288" anchor="ctr">
-            <a:spAutoFit/>
-          </a:bodyPr>
-          <a:lstStyle/>
-          <a:p>
-            <a:pPr algn="l">
-              <a:spcAft>
-                <a:spcPts val="0"/>
-              </a:spcAft>
-            </a:pPr>
-            <a:r>
-              <a:rPr sz="1150" b="0" i="0">
-                <a:solidFill>
-                  <a:srgbClr val="8EDBD4"/>
-                </a:solidFill>
-                <a:latin typeface="Arial"/>
-              </a:rPr>
-              <a:t>The centre carries no singular force.</a:t>
-            </a:r>
-          </a:p>
-        </p:txBody>
-      </p:sp>
-      <p:sp>
-        <p:nvSpPr>
-          <p:cNvPr id="108" name="C4-E15 text 106" descr="sci-ppt:o106"/>
-          <p:cNvSpPr txBox="1"/>
-          <p:nvPr/>
-        </p:nvSpPr>
-        <p:spPr>
-          <a:xfrm>
-            <a:off x="320040" y="6473952"/>
-            <a:ext cx="11430000" cy="256032"/>
-          </a:xfrm>
-          <a:prstGeom prst="rect">
-            <a:avLst/>
-          </a:prstGeom>
-          <a:noFill/>
-          <a:effectLst/>
-        </p:spPr>
-        <p:txBody>
-          <a:bodyPr wrap="square" lIns="27432" rIns="27432" tIns="18288" bIns="18288" anchor="ctr">
+          <a:bodyPr wrap="none" lIns="18288" rIns="18288" tIns="18288" bIns="18288" anchor="t">
             <a:spAutoFit/>
           </a:bodyPr>
           <a:lstStyle/>
@@ -5771,7 +5852,7 @@
                 </a:solidFill>
                 <a:latin typeface="Arial"/>
               </a:rPr>
-              <a:t>Model schematic; geometry is not to scale.</a:t>
+              <a:t>Radial integration of Eq. C4-E15; pieces drawn for C₂ = −p₀b²/(8D_f) and C₄ = p₀b⁴/(64D_f) (preview of Eq. C4-E16).</a:t>
             </a:r>
           </a:p>
         </p:txBody>
